--- a/projects/cns-pharmacology-practical/slides/ch03-parkinsons-disease.pptx
+++ b/projects/cns-pharmacology-practical/slides/ch03-parkinsons-disease.pptx
@@ -6812,7 +6812,7 @@
                 </a:solidFill>
                 <a:latin typeface="Calibri"/>
               </a:rPr>
-              <a:t>45 minutes  ·  10 questions</a:t>
+              <a:t>60 minutes  ·  10 questions</a:t>
             </a:r>
           </a:p>
         </p:txBody>
@@ -12900,7 +12900,7 @@
                 </a:solidFill>
                 <a:latin typeface="Cambria"/>
               </a:rPr>
-              <a:t>45</a:t>
+              <a:t>60</a:t>
             </a:r>
           </a:p>
           <a:p>

--- a/projects/cns-pharmacology-practical/slides/ch03-parkinsons-disease.pptx
+++ b/projects/cns-pharmacology-practical/slides/ch03-parkinsons-disease.pptx
@@ -5963,6 +5963,110 @@
         </p:nvSpPr>
         <p:spPr>
           <a:xfrm>
+            <a:off x="411479" y="1444752"/>
+            <a:ext cx="11368735" cy="4800600"/>
+          </a:xfrm>
+          <a:prstGeom prst="roundRect">
+            <a:avLst>
+              <a:gd name="adj" fmla="val 4000"/>
+            </a:avLst>
+          </a:prstGeom>
+          <a:solidFill>
+            <a:srgbClr val="FFFFFF">
+              <a:alpha val="84000"/>
+            </a:srgbClr>
+          </a:solidFill>
+          <a:ln w="19050">
+            <a:solidFill>
+              <a:srgbClr val="FFFFFF"/>
+            </a:solidFill>
+          </a:ln>
+          <a:effectLst>
+            <a:outerShdw blurRad="203200" dist="50800" dir="5400000" algn="t" rotWithShape="0">
+              <a:srgbClr val="1A2340">
+                <a:alpha val="20000"/>
+              </a:srgbClr>
+            </a:outerShdw>
+          </a:effectLst>
+        </p:spPr>
+        <p:style>
+          <a:lnRef idx="1">
+            <a:schemeClr val="accent1"/>
+          </a:lnRef>
+          <a:fillRef idx="3">
+            <a:schemeClr val="accent1"/>
+          </a:fillRef>
+          <a:effectRef idx="2">
+            <a:schemeClr val="accent1"/>
+          </a:effectRef>
+          <a:fontRef idx="minor">
+            <a:schemeClr val="lt1"/>
+          </a:fontRef>
+        </p:style>
+        <p:txBody>
+          <a:bodyPr rtlCol="0" anchor="ctr"/>
+          <a:lstStyle/>
+          <a:p>
+            <a:pPr algn="ctr"/>
+          </a:p>
+        </p:txBody>
+      </p:sp>
+      <p:sp>
+        <p:nvSpPr>
+          <p:cNvPr id="12" name="Rounded Rectangle 11"/>
+          <p:cNvSpPr/>
+          <p:nvPr/>
+        </p:nvSpPr>
+        <p:spPr>
+          <a:xfrm>
+            <a:off x="731519" y="1508760"/>
+            <a:ext cx="10728655" cy="32004"/>
+          </a:xfrm>
+          <a:prstGeom prst="roundRect">
+            <a:avLst>
+              <a:gd name="adj" fmla="val 50000"/>
+            </a:avLst>
+          </a:prstGeom>
+          <a:solidFill>
+            <a:srgbClr val="FFFFFF">
+              <a:alpha val="85000"/>
+            </a:srgbClr>
+          </a:solidFill>
+          <a:ln>
+            <a:noFill/>
+          </a:ln>
+          <a:effectLst/>
+        </p:spPr>
+        <p:style>
+          <a:lnRef idx="1">
+            <a:schemeClr val="accent1"/>
+          </a:lnRef>
+          <a:fillRef idx="3">
+            <a:schemeClr val="accent1"/>
+          </a:fillRef>
+          <a:effectRef idx="2">
+            <a:schemeClr val="accent1"/>
+          </a:effectRef>
+          <a:fontRef idx="minor">
+            <a:schemeClr val="lt1"/>
+          </a:fontRef>
+        </p:style>
+        <p:txBody>
+          <a:bodyPr rtlCol="0" anchor="ctr"/>
+          <a:lstStyle/>
+          <a:p>
+            <a:pPr algn="ctr"/>
+          </a:p>
+        </p:txBody>
+      </p:sp>
+      <p:sp>
+        <p:nvSpPr>
+          <p:cNvPr id="13" name="Rounded Rectangle 12"/>
+          <p:cNvSpPr/>
+          <p:nvPr/>
+        </p:nvSpPr>
+        <p:spPr>
+          <a:xfrm>
             <a:off x="1645919" y="2103120"/>
             <a:ext cx="8899855" cy="2377440"/>
           </a:xfrm>
@@ -6013,7 +6117,7 @@
       </p:sp>
       <p:sp>
         <p:nvSpPr>
-          <p:cNvPr id="12" name="Rounded Rectangle 11"/>
+          <p:cNvPr id="14" name="Rounded Rectangle 13"/>
           <p:cNvSpPr/>
           <p:nvPr/>
         </p:nvSpPr>
@@ -6061,7 +6165,7 @@
       </p:sp>
       <p:sp>
         <p:nvSpPr>
-          <p:cNvPr id="13" name="Rounded Rectangle 12"/>
+          <p:cNvPr id="15" name="Rounded Rectangle 14"/>
           <p:cNvSpPr/>
           <p:nvPr/>
         </p:nvSpPr>
@@ -6129,7 +6233,7 @@
       </p:sp>
       <p:sp>
         <p:nvSpPr>
-          <p:cNvPr id="14" name="TextBox 13"/>
+          <p:cNvPr id="16" name="TextBox 15"/>
           <p:cNvSpPr txBox="1"/>
           <p:nvPr/>
         </p:nvSpPr>
@@ -6234,6 +6338,110 @@
           </a:prstGeom>
         </p:spPr>
       </p:pic>
+      <p:sp>
+        <p:nvSpPr>
+          <p:cNvPr id="10" name="Rounded Rectangle 9"/>
+          <p:cNvSpPr/>
+          <p:nvPr/>
+        </p:nvSpPr>
+        <p:spPr>
+          <a:xfrm>
+            <a:off x="4251960" y="548640"/>
+            <a:ext cx="7635240" cy="5715000"/>
+          </a:xfrm>
+          <a:prstGeom prst="roundRect">
+            <a:avLst>
+              <a:gd name="adj" fmla="val 4000"/>
+            </a:avLst>
+          </a:prstGeom>
+          <a:solidFill>
+            <a:srgbClr val="FFFFFF">
+              <a:alpha val="84000"/>
+            </a:srgbClr>
+          </a:solidFill>
+          <a:ln w="19050">
+            <a:solidFill>
+              <a:srgbClr val="FFFFFF"/>
+            </a:solidFill>
+          </a:ln>
+          <a:effectLst>
+            <a:outerShdw blurRad="203200" dist="50800" dir="5400000" algn="t" rotWithShape="0">
+              <a:srgbClr val="1A2340">
+                <a:alpha val="20000"/>
+              </a:srgbClr>
+            </a:outerShdw>
+          </a:effectLst>
+        </p:spPr>
+        <p:style>
+          <a:lnRef idx="1">
+            <a:schemeClr val="accent1"/>
+          </a:lnRef>
+          <a:fillRef idx="3">
+            <a:schemeClr val="accent1"/>
+          </a:fillRef>
+          <a:effectRef idx="2">
+            <a:schemeClr val="accent1"/>
+          </a:effectRef>
+          <a:fontRef idx="minor">
+            <a:schemeClr val="lt1"/>
+          </a:fontRef>
+        </p:style>
+        <p:txBody>
+          <a:bodyPr rtlCol="0" anchor="ctr"/>
+          <a:lstStyle/>
+          <a:p>
+            <a:pPr algn="ctr"/>
+          </a:p>
+        </p:txBody>
+      </p:sp>
+      <p:sp>
+        <p:nvSpPr>
+          <p:cNvPr id="11" name="Rounded Rectangle 10"/>
+          <p:cNvSpPr/>
+          <p:nvPr/>
+        </p:nvSpPr>
+        <p:spPr>
+          <a:xfrm>
+            <a:off x="4572000" y="612647"/>
+            <a:ext cx="6995159" cy="32004"/>
+          </a:xfrm>
+          <a:prstGeom prst="roundRect">
+            <a:avLst>
+              <a:gd name="adj" fmla="val 50000"/>
+            </a:avLst>
+          </a:prstGeom>
+          <a:solidFill>
+            <a:srgbClr val="FFFFFF">
+              <a:alpha val="85000"/>
+            </a:srgbClr>
+          </a:solidFill>
+          <a:ln>
+            <a:noFill/>
+          </a:ln>
+          <a:effectLst/>
+        </p:spPr>
+        <p:style>
+          <a:lnRef idx="1">
+            <a:schemeClr val="accent1"/>
+          </a:lnRef>
+          <a:fillRef idx="3">
+            <a:schemeClr val="accent1"/>
+          </a:fillRef>
+          <a:effectRef idx="2">
+            <a:schemeClr val="accent1"/>
+          </a:effectRef>
+          <a:fontRef idx="minor">
+            <a:schemeClr val="lt1"/>
+          </a:fontRef>
+        </p:style>
+        <p:txBody>
+          <a:bodyPr rtlCol="0" anchor="ctr"/>
+          <a:lstStyle/>
+          <a:p>
+            <a:pPr algn="ctr"/>
+          </a:p>
+        </p:txBody>
+      </p:sp>
       <p:sp>
         <p:nvSpPr>
           <p:cNvPr id="3" name="Rectangle 2"/>
@@ -6890,14 +7098,177 @@
       </p:pic>
       <p:sp>
         <p:nvSpPr>
-          <p:cNvPr id="11" name="TextBox 10"/>
+          <p:cNvPr id="11" name="Rounded Rectangle 10"/>
+          <p:cNvSpPr/>
+          <p:nvPr/>
+        </p:nvSpPr>
+        <p:spPr>
+          <a:xfrm>
+            <a:off x="411479" y="1444752"/>
+            <a:ext cx="11368735" cy="4800600"/>
+          </a:xfrm>
+          <a:prstGeom prst="roundRect">
+            <a:avLst>
+              <a:gd name="adj" fmla="val 4000"/>
+            </a:avLst>
+          </a:prstGeom>
+          <a:solidFill>
+            <a:srgbClr val="FFFFFF">
+              <a:alpha val="84000"/>
+            </a:srgbClr>
+          </a:solidFill>
+          <a:ln w="19050">
+            <a:solidFill>
+              <a:srgbClr val="FFFFFF"/>
+            </a:solidFill>
+          </a:ln>
+          <a:effectLst>
+            <a:outerShdw blurRad="203200" dist="50800" dir="5400000" algn="t" rotWithShape="0">
+              <a:srgbClr val="1A2340">
+                <a:alpha val="20000"/>
+              </a:srgbClr>
+            </a:outerShdw>
+          </a:effectLst>
+        </p:spPr>
+        <p:style>
+          <a:lnRef idx="1">
+            <a:schemeClr val="accent1"/>
+          </a:lnRef>
+          <a:fillRef idx="3">
+            <a:schemeClr val="accent1"/>
+          </a:fillRef>
+          <a:effectRef idx="2">
+            <a:schemeClr val="accent1"/>
+          </a:effectRef>
+          <a:fontRef idx="minor">
+            <a:schemeClr val="lt1"/>
+          </a:fontRef>
+        </p:style>
+        <p:txBody>
+          <a:bodyPr rtlCol="0" anchor="ctr"/>
+          <a:lstStyle/>
+          <a:p>
+            <a:pPr algn="ctr"/>
+          </a:p>
+        </p:txBody>
+      </p:sp>
+      <p:sp>
+        <p:nvSpPr>
+          <p:cNvPr id="12" name="Rounded Rectangle 11"/>
+          <p:cNvSpPr/>
+          <p:nvPr/>
+        </p:nvSpPr>
+        <p:spPr>
+          <a:xfrm>
+            <a:off x="731519" y="1508760"/>
+            <a:ext cx="10728655" cy="32004"/>
+          </a:xfrm>
+          <a:prstGeom prst="roundRect">
+            <a:avLst>
+              <a:gd name="adj" fmla="val 50000"/>
+            </a:avLst>
+          </a:prstGeom>
+          <a:solidFill>
+            <a:srgbClr val="FFFFFF">
+              <a:alpha val="85000"/>
+            </a:srgbClr>
+          </a:solidFill>
+          <a:ln>
+            <a:noFill/>
+          </a:ln>
+          <a:effectLst/>
+        </p:spPr>
+        <p:style>
+          <a:lnRef idx="1">
+            <a:schemeClr val="accent1"/>
+          </a:lnRef>
+          <a:fillRef idx="3">
+            <a:schemeClr val="accent1"/>
+          </a:fillRef>
+          <a:effectRef idx="2">
+            <a:schemeClr val="accent1"/>
+          </a:effectRef>
+          <a:fontRef idx="minor">
+            <a:schemeClr val="lt1"/>
+          </a:fontRef>
+        </p:style>
+        <p:txBody>
+          <a:bodyPr rtlCol="0" anchor="ctr"/>
+          <a:lstStyle/>
+          <a:p>
+            <a:pPr algn="ctr"/>
+          </a:p>
+        </p:txBody>
+      </p:sp>
+      <p:sp>
+        <p:nvSpPr>
+          <p:cNvPr id="13" name="Rounded Rectangle 12"/>
+          <p:cNvSpPr/>
+          <p:nvPr/>
+        </p:nvSpPr>
+        <p:spPr>
+          <a:xfrm>
+            <a:off x="548640" y="1591056"/>
+            <a:ext cx="64008" cy="2816860"/>
+          </a:xfrm>
+          <a:prstGeom prst="roundRect">
+            <a:avLst>
+              <a:gd name="adj" fmla="val 50000"/>
+            </a:avLst>
+          </a:prstGeom>
+          <a:solidFill>
+            <a:srgbClr val="8D6A2A"/>
+          </a:solidFill>
+          <a:ln>
+            <a:noFill/>
+          </a:ln>
+          <a:effectLst>
+            <a:outerShdw blurRad="203200" dist="50800" dir="5400000" algn="t" rotWithShape="0">
+              <a:srgbClr val="1A2340">
+                <a:alpha val="20000"/>
+              </a:srgbClr>
+            </a:outerShdw>
+          </a:effectLst>
+          <a:scene3d>
+            <a:camera prst="orthographicFront"/>
+            <a:lightRig rig="threePt" dir="t"/>
+          </a:scene3d>
+          <a:sp3d>
+            <a:bevelT w="44450" h="25400" prst="softRound"/>
+          </a:sp3d>
+        </p:spPr>
+        <p:style>
+          <a:lnRef idx="1">
+            <a:schemeClr val="accent1"/>
+          </a:lnRef>
+          <a:fillRef idx="3">
+            <a:schemeClr val="accent1"/>
+          </a:fillRef>
+          <a:effectRef idx="2">
+            <a:schemeClr val="accent1"/>
+          </a:effectRef>
+          <a:fontRef idx="minor">
+            <a:schemeClr val="lt1"/>
+          </a:fontRef>
+        </p:style>
+        <p:txBody>
+          <a:bodyPr rtlCol="0" anchor="ctr"/>
+          <a:lstStyle/>
+          <a:p>
+            <a:pPr algn="ctr"/>
+          </a:p>
+        </p:txBody>
+      </p:sp>
+      <p:sp>
+        <p:nvSpPr>
+          <p:cNvPr id="14" name="TextBox 13"/>
           <p:cNvSpPr txBox="1"/>
           <p:nvPr/>
         </p:nvSpPr>
         <p:spPr>
           <a:xfrm>
-            <a:off x="548640" y="1554480"/>
-            <a:ext cx="4480560" cy="4617720"/>
+            <a:off x="777240" y="1554480"/>
+            <a:ext cx="4251960" cy="4617720"/>
           </a:xfrm>
           <a:prstGeom prst="rect">
             <a:avLst/>
@@ -6954,7 +7325,7 @@
       </p:sp>
       <p:sp>
         <p:nvSpPr>
-          <p:cNvPr id="12" name="Oval 11"/>
+          <p:cNvPr id="15" name="Oval 14"/>
           <p:cNvSpPr/>
           <p:nvPr/>
         </p:nvSpPr>
@@ -7007,7 +7378,7 @@
       </p:sp>
       <p:sp>
         <p:nvSpPr>
-          <p:cNvPr id="13" name="TextBox 12"/>
+          <p:cNvPr id="16" name="TextBox 15"/>
           <p:cNvSpPr txBox="1"/>
           <p:nvPr/>
         </p:nvSpPr>
@@ -7050,7 +7421,7 @@
       </p:sp>
       <p:sp>
         <p:nvSpPr>
-          <p:cNvPr id="14" name="Oval 13"/>
+          <p:cNvPr id="17" name="Oval 16"/>
           <p:cNvSpPr/>
           <p:nvPr/>
         </p:nvSpPr>
@@ -7103,7 +7474,7 @@
       </p:sp>
       <p:sp>
         <p:nvSpPr>
-          <p:cNvPr id="15" name="TextBox 14"/>
+          <p:cNvPr id="18" name="TextBox 17"/>
           <p:cNvSpPr txBox="1"/>
           <p:nvPr/>
         </p:nvSpPr>
@@ -7533,6 +7904,110 @@
         </p:nvSpPr>
         <p:spPr>
           <a:xfrm>
+            <a:off x="411479" y="1444752"/>
+            <a:ext cx="11368735" cy="4800600"/>
+          </a:xfrm>
+          <a:prstGeom prst="roundRect">
+            <a:avLst>
+              <a:gd name="adj" fmla="val 4000"/>
+            </a:avLst>
+          </a:prstGeom>
+          <a:solidFill>
+            <a:srgbClr val="FFFFFF">
+              <a:alpha val="84000"/>
+            </a:srgbClr>
+          </a:solidFill>
+          <a:ln w="19050">
+            <a:solidFill>
+              <a:srgbClr val="FFFFFF"/>
+            </a:solidFill>
+          </a:ln>
+          <a:effectLst>
+            <a:outerShdw blurRad="203200" dist="50800" dir="5400000" algn="t" rotWithShape="0">
+              <a:srgbClr val="1A2340">
+                <a:alpha val="20000"/>
+              </a:srgbClr>
+            </a:outerShdw>
+          </a:effectLst>
+        </p:spPr>
+        <p:style>
+          <a:lnRef idx="1">
+            <a:schemeClr val="accent1"/>
+          </a:lnRef>
+          <a:fillRef idx="3">
+            <a:schemeClr val="accent1"/>
+          </a:fillRef>
+          <a:effectRef idx="2">
+            <a:schemeClr val="accent1"/>
+          </a:effectRef>
+          <a:fontRef idx="minor">
+            <a:schemeClr val="lt1"/>
+          </a:fontRef>
+        </p:style>
+        <p:txBody>
+          <a:bodyPr rtlCol="0" anchor="ctr"/>
+          <a:lstStyle/>
+          <a:p>
+            <a:pPr algn="ctr"/>
+          </a:p>
+        </p:txBody>
+      </p:sp>
+      <p:sp>
+        <p:nvSpPr>
+          <p:cNvPr id="12" name="Rounded Rectangle 11"/>
+          <p:cNvSpPr/>
+          <p:nvPr/>
+        </p:nvSpPr>
+        <p:spPr>
+          <a:xfrm>
+            <a:off x="731519" y="1508760"/>
+            <a:ext cx="10728655" cy="32004"/>
+          </a:xfrm>
+          <a:prstGeom prst="roundRect">
+            <a:avLst>
+              <a:gd name="adj" fmla="val 50000"/>
+            </a:avLst>
+          </a:prstGeom>
+          <a:solidFill>
+            <a:srgbClr val="FFFFFF">
+              <a:alpha val="85000"/>
+            </a:srgbClr>
+          </a:solidFill>
+          <a:ln>
+            <a:noFill/>
+          </a:ln>
+          <a:effectLst/>
+        </p:spPr>
+        <p:style>
+          <a:lnRef idx="1">
+            <a:schemeClr val="accent1"/>
+          </a:lnRef>
+          <a:fillRef idx="3">
+            <a:schemeClr val="accent1"/>
+          </a:fillRef>
+          <a:effectRef idx="2">
+            <a:schemeClr val="accent1"/>
+          </a:effectRef>
+          <a:fontRef idx="minor">
+            <a:schemeClr val="lt1"/>
+          </a:fontRef>
+        </p:style>
+        <p:txBody>
+          <a:bodyPr rtlCol="0" anchor="ctr"/>
+          <a:lstStyle/>
+          <a:p>
+            <a:pPr algn="ctr"/>
+          </a:p>
+        </p:txBody>
+      </p:sp>
+      <p:sp>
+        <p:nvSpPr>
+          <p:cNvPr id="13" name="Rounded Rectangle 12"/>
+          <p:cNvSpPr/>
+          <p:nvPr/>
+        </p:nvSpPr>
+        <p:spPr>
+          <a:xfrm>
             <a:off x="1645919" y="2103120"/>
             <a:ext cx="8899855" cy="2431288"/>
           </a:xfrm>
@@ -7583,7 +8058,7 @@
       </p:sp>
       <p:sp>
         <p:nvSpPr>
-          <p:cNvPr id="12" name="Rounded Rectangle 11"/>
+          <p:cNvPr id="14" name="Rounded Rectangle 13"/>
           <p:cNvSpPr/>
           <p:nvPr/>
         </p:nvSpPr>
@@ -7631,7 +8106,7 @@
       </p:sp>
       <p:sp>
         <p:nvSpPr>
-          <p:cNvPr id="13" name="Rounded Rectangle 12"/>
+          <p:cNvPr id="15" name="Rounded Rectangle 14"/>
           <p:cNvSpPr/>
           <p:nvPr/>
         </p:nvSpPr>
@@ -7699,7 +8174,7 @@
       </p:sp>
       <p:sp>
         <p:nvSpPr>
-          <p:cNvPr id="14" name="TextBox 13"/>
+          <p:cNvPr id="16" name="TextBox 15"/>
           <p:cNvSpPr txBox="1"/>
           <p:nvPr/>
         </p:nvSpPr>
@@ -8119,7 +8594,111 @@
       </p:pic>
       <p:sp>
         <p:nvSpPr>
-          <p:cNvPr id="11" name="Oval 10"/>
+          <p:cNvPr id="11" name="Rounded Rectangle 10"/>
+          <p:cNvSpPr/>
+          <p:nvPr/>
+        </p:nvSpPr>
+        <p:spPr>
+          <a:xfrm>
+            <a:off x="411479" y="1444752"/>
+            <a:ext cx="11368735" cy="4800600"/>
+          </a:xfrm>
+          <a:prstGeom prst="roundRect">
+            <a:avLst>
+              <a:gd name="adj" fmla="val 4000"/>
+            </a:avLst>
+          </a:prstGeom>
+          <a:solidFill>
+            <a:srgbClr val="FFFFFF">
+              <a:alpha val="84000"/>
+            </a:srgbClr>
+          </a:solidFill>
+          <a:ln w="19050">
+            <a:solidFill>
+              <a:srgbClr val="FFFFFF"/>
+            </a:solidFill>
+          </a:ln>
+          <a:effectLst>
+            <a:outerShdw blurRad="203200" dist="50800" dir="5400000" algn="t" rotWithShape="0">
+              <a:srgbClr val="1A2340">
+                <a:alpha val="20000"/>
+              </a:srgbClr>
+            </a:outerShdw>
+          </a:effectLst>
+        </p:spPr>
+        <p:style>
+          <a:lnRef idx="1">
+            <a:schemeClr val="accent1"/>
+          </a:lnRef>
+          <a:fillRef idx="3">
+            <a:schemeClr val="accent1"/>
+          </a:fillRef>
+          <a:effectRef idx="2">
+            <a:schemeClr val="accent1"/>
+          </a:effectRef>
+          <a:fontRef idx="minor">
+            <a:schemeClr val="lt1"/>
+          </a:fontRef>
+        </p:style>
+        <p:txBody>
+          <a:bodyPr rtlCol="0" anchor="ctr"/>
+          <a:lstStyle/>
+          <a:p>
+            <a:pPr algn="ctr"/>
+          </a:p>
+        </p:txBody>
+      </p:sp>
+      <p:sp>
+        <p:nvSpPr>
+          <p:cNvPr id="12" name="Rounded Rectangle 11"/>
+          <p:cNvSpPr/>
+          <p:nvPr/>
+        </p:nvSpPr>
+        <p:spPr>
+          <a:xfrm>
+            <a:off x="731519" y="1508760"/>
+            <a:ext cx="10728655" cy="32004"/>
+          </a:xfrm>
+          <a:prstGeom prst="roundRect">
+            <a:avLst>
+              <a:gd name="adj" fmla="val 50000"/>
+            </a:avLst>
+          </a:prstGeom>
+          <a:solidFill>
+            <a:srgbClr val="FFFFFF">
+              <a:alpha val="85000"/>
+            </a:srgbClr>
+          </a:solidFill>
+          <a:ln>
+            <a:noFill/>
+          </a:ln>
+          <a:effectLst/>
+        </p:spPr>
+        <p:style>
+          <a:lnRef idx="1">
+            <a:schemeClr val="accent1"/>
+          </a:lnRef>
+          <a:fillRef idx="3">
+            <a:schemeClr val="accent1"/>
+          </a:fillRef>
+          <a:effectRef idx="2">
+            <a:schemeClr val="accent1"/>
+          </a:effectRef>
+          <a:fontRef idx="minor">
+            <a:schemeClr val="lt1"/>
+          </a:fontRef>
+        </p:style>
+        <p:txBody>
+          <a:bodyPr rtlCol="0" anchor="ctr"/>
+          <a:lstStyle/>
+          <a:p>
+            <a:pPr algn="ctr"/>
+          </a:p>
+        </p:txBody>
+      </p:sp>
+      <p:sp>
+        <p:nvSpPr>
+          <p:cNvPr id="13" name="Oval 12"/>
           <p:cNvSpPr/>
           <p:nvPr/>
         </p:nvSpPr>
@@ -8172,7 +8751,7 @@
       </p:sp>
       <p:sp>
         <p:nvSpPr>
-          <p:cNvPr id="12" name="TextBox 11"/>
+          <p:cNvPr id="14" name="TextBox 13"/>
           <p:cNvSpPr txBox="1"/>
           <p:nvPr/>
         </p:nvSpPr>
@@ -8215,7 +8794,7 @@
       </p:sp>
       <p:sp>
         <p:nvSpPr>
-          <p:cNvPr id="13" name="Oval 12"/>
+          <p:cNvPr id="15" name="Oval 14"/>
           <p:cNvSpPr/>
           <p:nvPr/>
         </p:nvSpPr>
@@ -8268,7 +8847,7 @@
       </p:sp>
       <p:sp>
         <p:nvSpPr>
-          <p:cNvPr id="14" name="TextBox 13"/>
+          <p:cNvPr id="16" name="TextBox 15"/>
           <p:cNvSpPr txBox="1"/>
           <p:nvPr/>
         </p:nvSpPr>
@@ -8311,7 +8890,7 @@
       </p:sp>
       <p:sp>
         <p:nvSpPr>
-          <p:cNvPr id="15" name="Oval 14"/>
+          <p:cNvPr id="17" name="Oval 16"/>
           <p:cNvSpPr/>
           <p:nvPr/>
         </p:nvSpPr>
@@ -8364,7 +8943,7 @@
       </p:sp>
       <p:sp>
         <p:nvSpPr>
-          <p:cNvPr id="16" name="TextBox 15"/>
+          <p:cNvPr id="18" name="TextBox 17"/>
           <p:cNvSpPr txBox="1"/>
           <p:nvPr/>
         </p:nvSpPr>
@@ -8407,7 +8986,7 @@
       </p:sp>
       <p:sp>
         <p:nvSpPr>
-          <p:cNvPr id="17" name="Oval 16"/>
+          <p:cNvPr id="19" name="Oval 18"/>
           <p:cNvSpPr/>
           <p:nvPr/>
         </p:nvSpPr>
@@ -8460,7 +9039,7 @@
       </p:sp>
       <p:sp>
         <p:nvSpPr>
-          <p:cNvPr id="18" name="TextBox 17"/>
+          <p:cNvPr id="20" name="TextBox 19"/>
           <p:cNvSpPr txBox="1"/>
           <p:nvPr/>
         </p:nvSpPr>
@@ -8882,9 +9461,113 @@
           </a:prstGeom>
         </p:spPr>
       </p:pic>
+      <p:sp>
+        <p:nvSpPr>
+          <p:cNvPr id="11" name="Rounded Rectangle 10"/>
+          <p:cNvSpPr/>
+          <p:nvPr/>
+        </p:nvSpPr>
+        <p:spPr>
+          <a:xfrm>
+            <a:off x="411479" y="1444752"/>
+            <a:ext cx="11368735" cy="4800600"/>
+          </a:xfrm>
+          <a:prstGeom prst="roundRect">
+            <a:avLst>
+              <a:gd name="adj" fmla="val 4000"/>
+            </a:avLst>
+          </a:prstGeom>
+          <a:solidFill>
+            <a:srgbClr val="FFFFFF">
+              <a:alpha val="84000"/>
+            </a:srgbClr>
+          </a:solidFill>
+          <a:ln w="19050">
+            <a:solidFill>
+              <a:srgbClr val="FFFFFF"/>
+            </a:solidFill>
+          </a:ln>
+          <a:effectLst>
+            <a:outerShdw blurRad="203200" dist="50800" dir="5400000" algn="t" rotWithShape="0">
+              <a:srgbClr val="1A2340">
+                <a:alpha val="20000"/>
+              </a:srgbClr>
+            </a:outerShdw>
+          </a:effectLst>
+        </p:spPr>
+        <p:style>
+          <a:lnRef idx="1">
+            <a:schemeClr val="accent1"/>
+          </a:lnRef>
+          <a:fillRef idx="3">
+            <a:schemeClr val="accent1"/>
+          </a:fillRef>
+          <a:effectRef idx="2">
+            <a:schemeClr val="accent1"/>
+          </a:effectRef>
+          <a:fontRef idx="minor">
+            <a:schemeClr val="lt1"/>
+          </a:fontRef>
+        </p:style>
+        <p:txBody>
+          <a:bodyPr rtlCol="0" anchor="ctr"/>
+          <a:lstStyle/>
+          <a:p>
+            <a:pPr algn="ctr"/>
+          </a:p>
+        </p:txBody>
+      </p:sp>
+      <p:sp>
+        <p:nvSpPr>
+          <p:cNvPr id="12" name="Rounded Rectangle 11"/>
+          <p:cNvSpPr/>
+          <p:nvPr/>
+        </p:nvSpPr>
+        <p:spPr>
+          <a:xfrm>
+            <a:off x="731519" y="1508760"/>
+            <a:ext cx="10728655" cy="32004"/>
+          </a:xfrm>
+          <a:prstGeom prst="roundRect">
+            <a:avLst>
+              <a:gd name="adj" fmla="val 50000"/>
+            </a:avLst>
+          </a:prstGeom>
+          <a:solidFill>
+            <a:srgbClr val="FFFFFF">
+              <a:alpha val="85000"/>
+            </a:srgbClr>
+          </a:solidFill>
+          <a:ln>
+            <a:noFill/>
+          </a:ln>
+          <a:effectLst/>
+        </p:spPr>
+        <p:style>
+          <a:lnRef idx="1">
+            <a:schemeClr val="accent1"/>
+          </a:lnRef>
+          <a:fillRef idx="3">
+            <a:schemeClr val="accent1"/>
+          </a:fillRef>
+          <a:effectRef idx="2">
+            <a:schemeClr val="accent1"/>
+          </a:effectRef>
+          <a:fontRef idx="minor">
+            <a:schemeClr val="lt1"/>
+          </a:fontRef>
+        </p:style>
+        <p:txBody>
+          <a:bodyPr rtlCol="0" anchor="ctr"/>
+          <a:lstStyle/>
+          <a:p>
+            <a:pPr algn="ctr"/>
+          </a:p>
+        </p:txBody>
+      </p:sp>
       <p:graphicFrame>
         <p:nvGraphicFramePr>
-          <p:cNvPr id="11" name="Table 10"/>
+          <p:cNvPr id="13" name="Table 12"/>
           <p:cNvGraphicFramePr>
             <a:graphicFrameLocks noGrp="1"/>
           </p:cNvGraphicFramePr>
@@ -9766,9 +10449,113 @@
           </a:prstGeom>
         </p:spPr>
       </p:pic>
+      <p:sp>
+        <p:nvSpPr>
+          <p:cNvPr id="11" name="Rounded Rectangle 10"/>
+          <p:cNvSpPr/>
+          <p:nvPr/>
+        </p:nvSpPr>
+        <p:spPr>
+          <a:xfrm>
+            <a:off x="411479" y="1444752"/>
+            <a:ext cx="11368735" cy="4800600"/>
+          </a:xfrm>
+          <a:prstGeom prst="roundRect">
+            <a:avLst>
+              <a:gd name="adj" fmla="val 4000"/>
+            </a:avLst>
+          </a:prstGeom>
+          <a:solidFill>
+            <a:srgbClr val="FFFFFF">
+              <a:alpha val="84000"/>
+            </a:srgbClr>
+          </a:solidFill>
+          <a:ln w="19050">
+            <a:solidFill>
+              <a:srgbClr val="FFFFFF"/>
+            </a:solidFill>
+          </a:ln>
+          <a:effectLst>
+            <a:outerShdw blurRad="203200" dist="50800" dir="5400000" algn="t" rotWithShape="0">
+              <a:srgbClr val="1A2340">
+                <a:alpha val="20000"/>
+              </a:srgbClr>
+            </a:outerShdw>
+          </a:effectLst>
+        </p:spPr>
+        <p:style>
+          <a:lnRef idx="1">
+            <a:schemeClr val="accent1"/>
+          </a:lnRef>
+          <a:fillRef idx="3">
+            <a:schemeClr val="accent1"/>
+          </a:fillRef>
+          <a:effectRef idx="2">
+            <a:schemeClr val="accent1"/>
+          </a:effectRef>
+          <a:fontRef idx="minor">
+            <a:schemeClr val="lt1"/>
+          </a:fontRef>
+        </p:style>
+        <p:txBody>
+          <a:bodyPr rtlCol="0" anchor="ctr"/>
+          <a:lstStyle/>
+          <a:p>
+            <a:pPr algn="ctr"/>
+          </a:p>
+        </p:txBody>
+      </p:sp>
+      <p:sp>
+        <p:nvSpPr>
+          <p:cNvPr id="12" name="Rounded Rectangle 11"/>
+          <p:cNvSpPr/>
+          <p:nvPr/>
+        </p:nvSpPr>
+        <p:spPr>
+          <a:xfrm>
+            <a:off x="731519" y="1508760"/>
+            <a:ext cx="10728655" cy="32004"/>
+          </a:xfrm>
+          <a:prstGeom prst="roundRect">
+            <a:avLst>
+              <a:gd name="adj" fmla="val 50000"/>
+            </a:avLst>
+          </a:prstGeom>
+          <a:solidFill>
+            <a:srgbClr val="FFFFFF">
+              <a:alpha val="85000"/>
+            </a:srgbClr>
+          </a:solidFill>
+          <a:ln>
+            <a:noFill/>
+          </a:ln>
+          <a:effectLst/>
+        </p:spPr>
+        <p:style>
+          <a:lnRef idx="1">
+            <a:schemeClr val="accent1"/>
+          </a:lnRef>
+          <a:fillRef idx="3">
+            <a:schemeClr val="accent1"/>
+          </a:fillRef>
+          <a:effectRef idx="2">
+            <a:schemeClr val="accent1"/>
+          </a:effectRef>
+          <a:fontRef idx="minor">
+            <a:schemeClr val="lt1"/>
+          </a:fontRef>
+        </p:style>
+        <p:txBody>
+          <a:bodyPr rtlCol="0" anchor="ctr"/>
+          <a:lstStyle/>
+          <a:p>
+            <a:pPr algn="ctr"/>
+          </a:p>
+        </p:txBody>
+      </p:sp>
       <p:graphicFrame>
         <p:nvGraphicFramePr>
-          <p:cNvPr id="11" name="Table 10"/>
+          <p:cNvPr id="13" name="Table 12"/>
           <p:cNvGraphicFramePr>
             <a:graphicFrameLocks noGrp="1"/>
           </p:cNvGraphicFramePr>
@@ -10495,9 +11282,113 @@
           </a:prstGeom>
         </p:spPr>
       </p:pic>
+      <p:sp>
+        <p:nvSpPr>
+          <p:cNvPr id="11" name="Rounded Rectangle 10"/>
+          <p:cNvSpPr/>
+          <p:nvPr/>
+        </p:nvSpPr>
+        <p:spPr>
+          <a:xfrm>
+            <a:off x="411479" y="1444752"/>
+            <a:ext cx="11368735" cy="4800600"/>
+          </a:xfrm>
+          <a:prstGeom prst="roundRect">
+            <a:avLst>
+              <a:gd name="adj" fmla="val 4000"/>
+            </a:avLst>
+          </a:prstGeom>
+          <a:solidFill>
+            <a:srgbClr val="FFFFFF">
+              <a:alpha val="84000"/>
+            </a:srgbClr>
+          </a:solidFill>
+          <a:ln w="19050">
+            <a:solidFill>
+              <a:srgbClr val="FFFFFF"/>
+            </a:solidFill>
+          </a:ln>
+          <a:effectLst>
+            <a:outerShdw blurRad="203200" dist="50800" dir="5400000" algn="t" rotWithShape="0">
+              <a:srgbClr val="1A2340">
+                <a:alpha val="20000"/>
+              </a:srgbClr>
+            </a:outerShdw>
+          </a:effectLst>
+        </p:spPr>
+        <p:style>
+          <a:lnRef idx="1">
+            <a:schemeClr val="accent1"/>
+          </a:lnRef>
+          <a:fillRef idx="3">
+            <a:schemeClr val="accent1"/>
+          </a:fillRef>
+          <a:effectRef idx="2">
+            <a:schemeClr val="accent1"/>
+          </a:effectRef>
+          <a:fontRef idx="minor">
+            <a:schemeClr val="lt1"/>
+          </a:fontRef>
+        </p:style>
+        <p:txBody>
+          <a:bodyPr rtlCol="0" anchor="ctr"/>
+          <a:lstStyle/>
+          <a:p>
+            <a:pPr algn="ctr"/>
+          </a:p>
+        </p:txBody>
+      </p:sp>
+      <p:sp>
+        <p:nvSpPr>
+          <p:cNvPr id="12" name="Rounded Rectangle 11"/>
+          <p:cNvSpPr/>
+          <p:nvPr/>
+        </p:nvSpPr>
+        <p:spPr>
+          <a:xfrm>
+            <a:off x="731519" y="1508760"/>
+            <a:ext cx="10728655" cy="32004"/>
+          </a:xfrm>
+          <a:prstGeom prst="roundRect">
+            <a:avLst>
+              <a:gd name="adj" fmla="val 50000"/>
+            </a:avLst>
+          </a:prstGeom>
+          <a:solidFill>
+            <a:srgbClr val="FFFFFF">
+              <a:alpha val="85000"/>
+            </a:srgbClr>
+          </a:solidFill>
+          <a:ln>
+            <a:noFill/>
+          </a:ln>
+          <a:effectLst/>
+        </p:spPr>
+        <p:style>
+          <a:lnRef idx="1">
+            <a:schemeClr val="accent1"/>
+          </a:lnRef>
+          <a:fillRef idx="3">
+            <a:schemeClr val="accent1"/>
+          </a:fillRef>
+          <a:effectRef idx="2">
+            <a:schemeClr val="accent1"/>
+          </a:effectRef>
+          <a:fontRef idx="minor">
+            <a:schemeClr val="lt1"/>
+          </a:fontRef>
+        </p:style>
+        <p:txBody>
+          <a:bodyPr rtlCol="0" anchor="ctr"/>
+          <a:lstStyle/>
+          <a:p>
+            <a:pPr algn="ctr"/>
+          </a:p>
+        </p:txBody>
+      </p:sp>
       <p:graphicFrame>
         <p:nvGraphicFramePr>
-          <p:cNvPr id="11" name="Table 10"/>
+          <p:cNvPr id="13" name="Table 12"/>
           <p:cNvGraphicFramePr>
             <a:graphicFrameLocks noGrp="1"/>
           </p:cNvGraphicFramePr>
@@ -11109,7 +12000,111 @@
       </p:pic>
       <p:sp>
         <p:nvSpPr>
-          <p:cNvPr id="11" name="Oval 10"/>
+          <p:cNvPr id="11" name="Rounded Rectangle 10"/>
+          <p:cNvSpPr/>
+          <p:nvPr/>
+        </p:nvSpPr>
+        <p:spPr>
+          <a:xfrm>
+            <a:off x="411479" y="1444752"/>
+            <a:ext cx="11368735" cy="4800600"/>
+          </a:xfrm>
+          <a:prstGeom prst="roundRect">
+            <a:avLst>
+              <a:gd name="adj" fmla="val 4000"/>
+            </a:avLst>
+          </a:prstGeom>
+          <a:solidFill>
+            <a:srgbClr val="FFFFFF">
+              <a:alpha val="84000"/>
+            </a:srgbClr>
+          </a:solidFill>
+          <a:ln w="19050">
+            <a:solidFill>
+              <a:srgbClr val="FFFFFF"/>
+            </a:solidFill>
+          </a:ln>
+          <a:effectLst>
+            <a:outerShdw blurRad="203200" dist="50800" dir="5400000" algn="t" rotWithShape="0">
+              <a:srgbClr val="1A2340">
+                <a:alpha val="20000"/>
+              </a:srgbClr>
+            </a:outerShdw>
+          </a:effectLst>
+        </p:spPr>
+        <p:style>
+          <a:lnRef idx="1">
+            <a:schemeClr val="accent1"/>
+          </a:lnRef>
+          <a:fillRef idx="3">
+            <a:schemeClr val="accent1"/>
+          </a:fillRef>
+          <a:effectRef idx="2">
+            <a:schemeClr val="accent1"/>
+          </a:effectRef>
+          <a:fontRef idx="minor">
+            <a:schemeClr val="lt1"/>
+          </a:fontRef>
+        </p:style>
+        <p:txBody>
+          <a:bodyPr rtlCol="0" anchor="ctr"/>
+          <a:lstStyle/>
+          <a:p>
+            <a:pPr algn="ctr"/>
+          </a:p>
+        </p:txBody>
+      </p:sp>
+      <p:sp>
+        <p:nvSpPr>
+          <p:cNvPr id="12" name="Rounded Rectangle 11"/>
+          <p:cNvSpPr/>
+          <p:nvPr/>
+        </p:nvSpPr>
+        <p:spPr>
+          <a:xfrm>
+            <a:off x="731519" y="1508760"/>
+            <a:ext cx="10728655" cy="32004"/>
+          </a:xfrm>
+          <a:prstGeom prst="roundRect">
+            <a:avLst>
+              <a:gd name="adj" fmla="val 50000"/>
+            </a:avLst>
+          </a:prstGeom>
+          <a:solidFill>
+            <a:srgbClr val="FFFFFF">
+              <a:alpha val="85000"/>
+            </a:srgbClr>
+          </a:solidFill>
+          <a:ln>
+            <a:noFill/>
+          </a:ln>
+          <a:effectLst/>
+        </p:spPr>
+        <p:style>
+          <a:lnRef idx="1">
+            <a:schemeClr val="accent1"/>
+          </a:lnRef>
+          <a:fillRef idx="3">
+            <a:schemeClr val="accent1"/>
+          </a:fillRef>
+          <a:effectRef idx="2">
+            <a:schemeClr val="accent1"/>
+          </a:effectRef>
+          <a:fontRef idx="minor">
+            <a:schemeClr val="lt1"/>
+          </a:fontRef>
+        </p:style>
+        <p:txBody>
+          <a:bodyPr rtlCol="0" anchor="ctr"/>
+          <a:lstStyle/>
+          <a:p>
+            <a:pPr algn="ctr"/>
+          </a:p>
+        </p:txBody>
+      </p:sp>
+      <p:sp>
+        <p:nvSpPr>
+          <p:cNvPr id="13" name="Oval 12"/>
           <p:cNvSpPr/>
           <p:nvPr/>
         </p:nvSpPr>
@@ -11162,7 +12157,7 @@
       </p:sp>
       <p:sp>
         <p:nvSpPr>
-          <p:cNvPr id="12" name="TextBox 11"/>
+          <p:cNvPr id="14" name="TextBox 13"/>
           <p:cNvSpPr txBox="1"/>
           <p:nvPr/>
         </p:nvSpPr>
@@ -11196,7 +12191,7 @@
       </p:sp>
       <p:sp>
         <p:nvSpPr>
-          <p:cNvPr id="13" name="Oval 12"/>
+          <p:cNvPr id="15" name="Oval 14"/>
           <p:cNvSpPr/>
           <p:nvPr/>
         </p:nvSpPr>
@@ -11249,7 +12244,7 @@
       </p:sp>
       <p:sp>
         <p:nvSpPr>
-          <p:cNvPr id="14" name="TextBox 13"/>
+          <p:cNvPr id="16" name="TextBox 15"/>
           <p:cNvSpPr txBox="1"/>
           <p:nvPr/>
         </p:nvSpPr>
@@ -11283,7 +12278,7 @@
       </p:sp>
       <p:sp>
         <p:nvSpPr>
-          <p:cNvPr id="15" name="Oval 14"/>
+          <p:cNvPr id="17" name="Oval 16"/>
           <p:cNvSpPr/>
           <p:nvPr/>
         </p:nvSpPr>
@@ -11336,7 +12331,7 @@
       </p:sp>
       <p:sp>
         <p:nvSpPr>
-          <p:cNvPr id="16" name="TextBox 15"/>
+          <p:cNvPr id="18" name="TextBox 17"/>
           <p:cNvSpPr txBox="1"/>
           <p:nvPr/>
         </p:nvSpPr>
@@ -11751,7 +12746,111 @@
       </p:pic>
       <p:sp>
         <p:nvSpPr>
-          <p:cNvPr id="11" name="TextBox 10"/>
+          <p:cNvPr id="11" name="Rounded Rectangle 10"/>
+          <p:cNvSpPr/>
+          <p:nvPr/>
+        </p:nvSpPr>
+        <p:spPr>
+          <a:xfrm>
+            <a:off x="411479" y="1444752"/>
+            <a:ext cx="11368735" cy="4800600"/>
+          </a:xfrm>
+          <a:prstGeom prst="roundRect">
+            <a:avLst>
+              <a:gd name="adj" fmla="val 4000"/>
+            </a:avLst>
+          </a:prstGeom>
+          <a:solidFill>
+            <a:srgbClr val="FFFFFF">
+              <a:alpha val="84000"/>
+            </a:srgbClr>
+          </a:solidFill>
+          <a:ln w="19050">
+            <a:solidFill>
+              <a:srgbClr val="FFFFFF"/>
+            </a:solidFill>
+          </a:ln>
+          <a:effectLst>
+            <a:outerShdw blurRad="203200" dist="50800" dir="5400000" algn="t" rotWithShape="0">
+              <a:srgbClr val="1A2340">
+                <a:alpha val="20000"/>
+              </a:srgbClr>
+            </a:outerShdw>
+          </a:effectLst>
+        </p:spPr>
+        <p:style>
+          <a:lnRef idx="1">
+            <a:schemeClr val="accent1"/>
+          </a:lnRef>
+          <a:fillRef idx="3">
+            <a:schemeClr val="accent1"/>
+          </a:fillRef>
+          <a:effectRef idx="2">
+            <a:schemeClr val="accent1"/>
+          </a:effectRef>
+          <a:fontRef idx="minor">
+            <a:schemeClr val="lt1"/>
+          </a:fontRef>
+        </p:style>
+        <p:txBody>
+          <a:bodyPr rtlCol="0" anchor="ctr"/>
+          <a:lstStyle/>
+          <a:p>
+            <a:pPr algn="ctr"/>
+          </a:p>
+        </p:txBody>
+      </p:sp>
+      <p:sp>
+        <p:nvSpPr>
+          <p:cNvPr id="12" name="Rounded Rectangle 11"/>
+          <p:cNvSpPr/>
+          <p:nvPr/>
+        </p:nvSpPr>
+        <p:spPr>
+          <a:xfrm>
+            <a:off x="731519" y="1508760"/>
+            <a:ext cx="10728655" cy="32004"/>
+          </a:xfrm>
+          <a:prstGeom prst="roundRect">
+            <a:avLst>
+              <a:gd name="adj" fmla="val 50000"/>
+            </a:avLst>
+          </a:prstGeom>
+          <a:solidFill>
+            <a:srgbClr val="FFFFFF">
+              <a:alpha val="85000"/>
+            </a:srgbClr>
+          </a:solidFill>
+          <a:ln>
+            <a:noFill/>
+          </a:ln>
+          <a:effectLst/>
+        </p:spPr>
+        <p:style>
+          <a:lnRef idx="1">
+            <a:schemeClr val="accent1"/>
+          </a:lnRef>
+          <a:fillRef idx="3">
+            <a:schemeClr val="accent1"/>
+          </a:fillRef>
+          <a:effectRef idx="2">
+            <a:schemeClr val="accent1"/>
+          </a:effectRef>
+          <a:fontRef idx="minor">
+            <a:schemeClr val="lt1"/>
+          </a:fontRef>
+        </p:style>
+        <p:txBody>
+          <a:bodyPr rtlCol="0" anchor="ctr"/>
+          <a:lstStyle/>
+          <a:p>
+            <a:pPr algn="ctr"/>
+          </a:p>
+        </p:txBody>
+      </p:sp>
+      <p:sp>
+        <p:nvSpPr>
+          <p:cNvPr id="13" name="TextBox 12"/>
           <p:cNvSpPr txBox="1"/>
           <p:nvPr/>
         </p:nvSpPr>
@@ -11785,7 +12884,7 @@
       </p:sp>
       <p:sp>
         <p:nvSpPr>
-          <p:cNvPr id="12" name="Rounded Rectangle 11"/>
+          <p:cNvPr id="14" name="Rounded Rectangle 13"/>
           <p:cNvSpPr/>
           <p:nvPr/>
         </p:nvSpPr>
@@ -11841,7 +12940,7 @@
       </p:sp>
       <p:sp>
         <p:nvSpPr>
-          <p:cNvPr id="13" name="Oval 12"/>
+          <p:cNvPr id="15" name="Oval 14"/>
           <p:cNvSpPr/>
           <p:nvPr/>
         </p:nvSpPr>
@@ -11894,7 +12993,7 @@
       </p:sp>
       <p:sp>
         <p:nvSpPr>
-          <p:cNvPr id="14" name="TextBox 13"/>
+          <p:cNvPr id="16" name="TextBox 15"/>
           <p:cNvSpPr txBox="1"/>
           <p:nvPr/>
         </p:nvSpPr>
@@ -11928,7 +13027,7 @@
       </p:sp>
       <p:sp>
         <p:nvSpPr>
-          <p:cNvPr id="15" name="Rounded Rectangle 14"/>
+          <p:cNvPr id="17" name="Rounded Rectangle 16"/>
           <p:cNvSpPr/>
           <p:nvPr/>
         </p:nvSpPr>
@@ -11984,7 +13083,7 @@
       </p:sp>
       <p:sp>
         <p:nvSpPr>
-          <p:cNvPr id="16" name="Oval 15"/>
+          <p:cNvPr id="18" name="Oval 17"/>
           <p:cNvSpPr/>
           <p:nvPr/>
         </p:nvSpPr>
@@ -12037,7 +13136,7 @@
       </p:sp>
       <p:sp>
         <p:nvSpPr>
-          <p:cNvPr id="17" name="TextBox 16"/>
+          <p:cNvPr id="19" name="TextBox 18"/>
           <p:cNvSpPr txBox="1"/>
           <p:nvPr/>
         </p:nvSpPr>
@@ -12071,7 +13170,7 @@
       </p:sp>
       <p:sp>
         <p:nvSpPr>
-          <p:cNvPr id="18" name="Rounded Rectangle 17"/>
+          <p:cNvPr id="20" name="Rounded Rectangle 19"/>
           <p:cNvSpPr/>
           <p:nvPr/>
         </p:nvSpPr>
@@ -12127,7 +13226,7 @@
       </p:sp>
       <p:sp>
         <p:nvSpPr>
-          <p:cNvPr id="19" name="Oval 18"/>
+          <p:cNvPr id="21" name="Oval 20"/>
           <p:cNvSpPr/>
           <p:nvPr/>
         </p:nvSpPr>
@@ -12180,7 +13279,7 @@
       </p:sp>
       <p:sp>
         <p:nvSpPr>
-          <p:cNvPr id="20" name="TextBox 19"/>
+          <p:cNvPr id="22" name="TextBox 21"/>
           <p:cNvSpPr txBox="1"/>
           <p:nvPr/>
         </p:nvSpPr>
@@ -12214,7 +13313,7 @@
       </p:sp>
       <p:sp>
         <p:nvSpPr>
-          <p:cNvPr id="21" name="Rounded Rectangle 20"/>
+          <p:cNvPr id="23" name="Rounded Rectangle 22"/>
           <p:cNvSpPr/>
           <p:nvPr/>
         </p:nvSpPr>
@@ -12270,7 +13369,7 @@
       </p:sp>
       <p:sp>
         <p:nvSpPr>
-          <p:cNvPr id="22" name="Oval 21"/>
+          <p:cNvPr id="24" name="Oval 23"/>
           <p:cNvSpPr/>
           <p:nvPr/>
         </p:nvSpPr>
@@ -12323,7 +13422,7 @@
       </p:sp>
       <p:sp>
         <p:nvSpPr>
-          <p:cNvPr id="23" name="TextBox 22"/>
+          <p:cNvPr id="25" name="TextBox 24"/>
           <p:cNvSpPr txBox="1"/>
           <p:nvPr/>
         </p:nvSpPr>
@@ -12738,7 +13837,111 @@
       </p:pic>
       <p:sp>
         <p:nvSpPr>
-          <p:cNvPr id="11" name="Oval 10"/>
+          <p:cNvPr id="11" name="Rounded Rectangle 10"/>
+          <p:cNvSpPr/>
+          <p:nvPr/>
+        </p:nvSpPr>
+        <p:spPr>
+          <a:xfrm>
+            <a:off x="411479" y="1444752"/>
+            <a:ext cx="11368735" cy="4800600"/>
+          </a:xfrm>
+          <a:prstGeom prst="roundRect">
+            <a:avLst>
+              <a:gd name="adj" fmla="val 4000"/>
+            </a:avLst>
+          </a:prstGeom>
+          <a:solidFill>
+            <a:srgbClr val="FFFFFF">
+              <a:alpha val="84000"/>
+            </a:srgbClr>
+          </a:solidFill>
+          <a:ln w="19050">
+            <a:solidFill>
+              <a:srgbClr val="FFFFFF"/>
+            </a:solidFill>
+          </a:ln>
+          <a:effectLst>
+            <a:outerShdw blurRad="203200" dist="50800" dir="5400000" algn="t" rotWithShape="0">
+              <a:srgbClr val="1A2340">
+                <a:alpha val="20000"/>
+              </a:srgbClr>
+            </a:outerShdw>
+          </a:effectLst>
+        </p:spPr>
+        <p:style>
+          <a:lnRef idx="1">
+            <a:schemeClr val="accent1"/>
+          </a:lnRef>
+          <a:fillRef idx="3">
+            <a:schemeClr val="accent1"/>
+          </a:fillRef>
+          <a:effectRef idx="2">
+            <a:schemeClr val="accent1"/>
+          </a:effectRef>
+          <a:fontRef idx="minor">
+            <a:schemeClr val="lt1"/>
+          </a:fontRef>
+        </p:style>
+        <p:txBody>
+          <a:bodyPr rtlCol="0" anchor="ctr"/>
+          <a:lstStyle/>
+          <a:p>
+            <a:pPr algn="ctr"/>
+          </a:p>
+        </p:txBody>
+      </p:sp>
+      <p:sp>
+        <p:nvSpPr>
+          <p:cNvPr id="12" name="Rounded Rectangle 11"/>
+          <p:cNvSpPr/>
+          <p:nvPr/>
+        </p:nvSpPr>
+        <p:spPr>
+          <a:xfrm>
+            <a:off x="731519" y="1508760"/>
+            <a:ext cx="10728655" cy="32004"/>
+          </a:xfrm>
+          <a:prstGeom prst="roundRect">
+            <a:avLst>
+              <a:gd name="adj" fmla="val 50000"/>
+            </a:avLst>
+          </a:prstGeom>
+          <a:solidFill>
+            <a:srgbClr val="FFFFFF">
+              <a:alpha val="85000"/>
+            </a:srgbClr>
+          </a:solidFill>
+          <a:ln>
+            <a:noFill/>
+          </a:ln>
+          <a:effectLst/>
+        </p:spPr>
+        <p:style>
+          <a:lnRef idx="1">
+            <a:schemeClr val="accent1"/>
+          </a:lnRef>
+          <a:fillRef idx="3">
+            <a:schemeClr val="accent1"/>
+          </a:fillRef>
+          <a:effectRef idx="2">
+            <a:schemeClr val="accent1"/>
+          </a:effectRef>
+          <a:fontRef idx="minor">
+            <a:schemeClr val="lt1"/>
+          </a:fontRef>
+        </p:style>
+        <p:txBody>
+          <a:bodyPr rtlCol="0" anchor="ctr"/>
+          <a:lstStyle/>
+          <a:p>
+            <a:pPr algn="ctr"/>
+          </a:p>
+        </p:txBody>
+      </p:sp>
+      <p:sp>
+        <p:nvSpPr>
+          <p:cNvPr id="13" name="Oval 12"/>
           <p:cNvSpPr/>
           <p:nvPr/>
         </p:nvSpPr>
@@ -12791,7 +13994,7 @@
       </p:sp>
       <p:sp>
         <p:nvSpPr>
-          <p:cNvPr id="12" name="TextBox 11"/>
+          <p:cNvPr id="14" name="TextBox 13"/>
           <p:cNvSpPr txBox="1"/>
           <p:nvPr/>
         </p:nvSpPr>
@@ -12825,7 +14028,7 @@
       </p:sp>
       <p:sp>
         <p:nvSpPr>
-          <p:cNvPr id="13" name="Oval 12"/>
+          <p:cNvPr id="15" name="Oval 14"/>
           <p:cNvSpPr/>
           <p:nvPr/>
         </p:nvSpPr>
@@ -12878,7 +14081,7 @@
       </p:sp>
       <p:sp>
         <p:nvSpPr>
-          <p:cNvPr id="14" name="TextBox 13"/>
+          <p:cNvPr id="16" name="TextBox 15"/>
           <p:cNvSpPr txBox="1"/>
           <p:nvPr/>
         </p:nvSpPr>
@@ -12912,7 +14115,7 @@
       </p:sp>
       <p:sp>
         <p:nvSpPr>
-          <p:cNvPr id="15" name="Oval 14"/>
+          <p:cNvPr id="17" name="Oval 16"/>
           <p:cNvSpPr/>
           <p:nvPr/>
         </p:nvSpPr>
@@ -12965,7 +14168,7 @@
       </p:sp>
       <p:sp>
         <p:nvSpPr>
-          <p:cNvPr id="16" name="TextBox 15"/>
+          <p:cNvPr id="18" name="TextBox 17"/>
           <p:cNvSpPr txBox="1"/>
           <p:nvPr/>
         </p:nvSpPr>
@@ -12999,7 +14202,7 @@
       </p:sp>
       <p:sp>
         <p:nvSpPr>
-          <p:cNvPr id="17" name="Oval 16"/>
+          <p:cNvPr id="19" name="Oval 18"/>
           <p:cNvSpPr/>
           <p:nvPr/>
         </p:nvSpPr>
@@ -13052,7 +14255,7 @@
       </p:sp>
       <p:sp>
         <p:nvSpPr>
-          <p:cNvPr id="18" name="TextBox 17"/>
+          <p:cNvPr id="20" name="TextBox 19"/>
           <p:cNvSpPr txBox="1"/>
           <p:nvPr/>
         </p:nvSpPr>
@@ -13086,7 +14289,7 @@
       </p:sp>
       <p:sp>
         <p:nvSpPr>
-          <p:cNvPr id="19" name="Oval 18"/>
+          <p:cNvPr id="21" name="Oval 20"/>
           <p:cNvSpPr/>
           <p:nvPr/>
         </p:nvSpPr>
@@ -13139,7 +14342,7 @@
       </p:sp>
       <p:sp>
         <p:nvSpPr>
-          <p:cNvPr id="20" name="TextBox 19"/>
+          <p:cNvPr id="22" name="TextBox 21"/>
           <p:cNvSpPr txBox="1"/>
           <p:nvPr/>
         </p:nvSpPr>
@@ -13173,7 +14376,7 @@
       </p:sp>
       <p:sp>
         <p:nvSpPr>
-          <p:cNvPr id="21" name="Rounded Rectangle 20"/>
+          <p:cNvPr id="23" name="Rounded Rectangle 22"/>
           <p:cNvSpPr/>
           <p:nvPr/>
         </p:nvSpPr>
@@ -13229,7 +14432,7 @@
       </p:sp>
       <p:sp>
         <p:nvSpPr>
-          <p:cNvPr id="22" name="Rounded Rectangle 21"/>
+          <p:cNvPr id="24" name="Rounded Rectangle 23"/>
           <p:cNvSpPr/>
           <p:nvPr/>
         </p:nvSpPr>
@@ -13277,7 +14480,7 @@
       </p:sp>
       <p:sp>
         <p:nvSpPr>
-          <p:cNvPr id="23" name="TextBox 22"/>
+          <p:cNvPr id="25" name="TextBox 24"/>
           <p:cNvSpPr txBox="1"/>
           <p:nvPr/>
         </p:nvSpPr>
@@ -13735,7 +14938,111 @@
       </p:pic>
       <p:sp>
         <p:nvSpPr>
-          <p:cNvPr id="11" name="TextBox 10"/>
+          <p:cNvPr id="11" name="Rounded Rectangle 10"/>
+          <p:cNvSpPr/>
+          <p:nvPr/>
+        </p:nvSpPr>
+        <p:spPr>
+          <a:xfrm>
+            <a:off x="411479" y="1444752"/>
+            <a:ext cx="11368735" cy="4800600"/>
+          </a:xfrm>
+          <a:prstGeom prst="roundRect">
+            <a:avLst>
+              <a:gd name="adj" fmla="val 4000"/>
+            </a:avLst>
+          </a:prstGeom>
+          <a:solidFill>
+            <a:srgbClr val="FFFFFF">
+              <a:alpha val="84000"/>
+            </a:srgbClr>
+          </a:solidFill>
+          <a:ln w="19050">
+            <a:solidFill>
+              <a:srgbClr val="FFFFFF"/>
+            </a:solidFill>
+          </a:ln>
+          <a:effectLst>
+            <a:outerShdw blurRad="203200" dist="50800" dir="5400000" algn="t" rotWithShape="0">
+              <a:srgbClr val="1A2340">
+                <a:alpha val="20000"/>
+              </a:srgbClr>
+            </a:outerShdw>
+          </a:effectLst>
+        </p:spPr>
+        <p:style>
+          <a:lnRef idx="1">
+            <a:schemeClr val="accent1"/>
+          </a:lnRef>
+          <a:fillRef idx="3">
+            <a:schemeClr val="accent1"/>
+          </a:fillRef>
+          <a:effectRef idx="2">
+            <a:schemeClr val="accent1"/>
+          </a:effectRef>
+          <a:fontRef idx="minor">
+            <a:schemeClr val="lt1"/>
+          </a:fontRef>
+        </p:style>
+        <p:txBody>
+          <a:bodyPr rtlCol="0" anchor="ctr"/>
+          <a:lstStyle/>
+          <a:p>
+            <a:pPr algn="ctr"/>
+          </a:p>
+        </p:txBody>
+      </p:sp>
+      <p:sp>
+        <p:nvSpPr>
+          <p:cNvPr id="12" name="Rounded Rectangle 11"/>
+          <p:cNvSpPr/>
+          <p:nvPr/>
+        </p:nvSpPr>
+        <p:spPr>
+          <a:xfrm>
+            <a:off x="731519" y="1508760"/>
+            <a:ext cx="10728655" cy="32004"/>
+          </a:xfrm>
+          <a:prstGeom prst="roundRect">
+            <a:avLst>
+              <a:gd name="adj" fmla="val 50000"/>
+            </a:avLst>
+          </a:prstGeom>
+          <a:solidFill>
+            <a:srgbClr val="FFFFFF">
+              <a:alpha val="85000"/>
+            </a:srgbClr>
+          </a:solidFill>
+          <a:ln>
+            <a:noFill/>
+          </a:ln>
+          <a:effectLst/>
+        </p:spPr>
+        <p:style>
+          <a:lnRef idx="1">
+            <a:schemeClr val="accent1"/>
+          </a:lnRef>
+          <a:fillRef idx="3">
+            <a:schemeClr val="accent1"/>
+          </a:fillRef>
+          <a:effectRef idx="2">
+            <a:schemeClr val="accent1"/>
+          </a:effectRef>
+          <a:fontRef idx="minor">
+            <a:schemeClr val="lt1"/>
+          </a:fontRef>
+        </p:style>
+        <p:txBody>
+          <a:bodyPr rtlCol="0" anchor="ctr"/>
+          <a:lstStyle/>
+          <a:p>
+            <a:pPr algn="ctr"/>
+          </a:p>
+        </p:txBody>
+      </p:sp>
+      <p:sp>
+        <p:nvSpPr>
+          <p:cNvPr id="13" name="TextBox 12"/>
           <p:cNvSpPr txBox="1"/>
           <p:nvPr/>
         </p:nvSpPr>
@@ -13769,7 +15076,7 @@
       </p:sp>
       <p:sp>
         <p:nvSpPr>
-          <p:cNvPr id="12" name="Rounded Rectangle 11"/>
+          <p:cNvPr id="14" name="Rounded Rectangle 13"/>
           <p:cNvSpPr/>
           <p:nvPr/>
         </p:nvSpPr>
@@ -13825,7 +15132,7 @@
       </p:sp>
       <p:sp>
         <p:nvSpPr>
-          <p:cNvPr id="13" name="Oval 12"/>
+          <p:cNvPr id="15" name="Oval 14"/>
           <p:cNvSpPr/>
           <p:nvPr/>
         </p:nvSpPr>
@@ -13878,7 +15185,7 @@
       </p:sp>
       <p:sp>
         <p:nvSpPr>
-          <p:cNvPr id="14" name="TextBox 13"/>
+          <p:cNvPr id="16" name="TextBox 15"/>
           <p:cNvSpPr txBox="1"/>
           <p:nvPr/>
         </p:nvSpPr>
@@ -13912,7 +15219,7 @@
       </p:sp>
       <p:sp>
         <p:nvSpPr>
-          <p:cNvPr id="15" name="Rounded Rectangle 14"/>
+          <p:cNvPr id="17" name="Rounded Rectangle 16"/>
           <p:cNvSpPr/>
           <p:nvPr/>
         </p:nvSpPr>
@@ -13971,7 +15278,7 @@
       </p:sp>
       <p:sp>
         <p:nvSpPr>
-          <p:cNvPr id="16" name="Oval 15"/>
+          <p:cNvPr id="18" name="Oval 17"/>
           <p:cNvSpPr/>
           <p:nvPr/>
         </p:nvSpPr>
@@ -14024,7 +15331,7 @@
       </p:sp>
       <p:sp>
         <p:nvSpPr>
-          <p:cNvPr id="17" name="TextBox 16"/>
+          <p:cNvPr id="19" name="TextBox 18"/>
           <p:cNvSpPr txBox="1"/>
           <p:nvPr/>
         </p:nvSpPr>
@@ -14058,7 +15365,7 @@
       </p:sp>
       <p:sp>
         <p:nvSpPr>
-          <p:cNvPr id="18" name="Rounded Rectangle 17"/>
+          <p:cNvPr id="20" name="Rounded Rectangle 19"/>
           <p:cNvSpPr/>
           <p:nvPr/>
         </p:nvSpPr>
@@ -14114,7 +15421,7 @@
       </p:sp>
       <p:sp>
         <p:nvSpPr>
-          <p:cNvPr id="19" name="Oval 18"/>
+          <p:cNvPr id="21" name="Oval 20"/>
           <p:cNvSpPr/>
           <p:nvPr/>
         </p:nvSpPr>
@@ -14167,7 +15474,7 @@
       </p:sp>
       <p:sp>
         <p:nvSpPr>
-          <p:cNvPr id="20" name="TextBox 19"/>
+          <p:cNvPr id="22" name="TextBox 21"/>
           <p:cNvSpPr txBox="1"/>
           <p:nvPr/>
         </p:nvSpPr>
@@ -14201,7 +15508,7 @@
       </p:sp>
       <p:sp>
         <p:nvSpPr>
-          <p:cNvPr id="21" name="Rounded Rectangle 20"/>
+          <p:cNvPr id="23" name="Rounded Rectangle 22"/>
           <p:cNvSpPr/>
           <p:nvPr/>
         </p:nvSpPr>
@@ -14257,7 +15564,7 @@
       </p:sp>
       <p:sp>
         <p:nvSpPr>
-          <p:cNvPr id="22" name="Oval 21"/>
+          <p:cNvPr id="24" name="Oval 23"/>
           <p:cNvSpPr/>
           <p:nvPr/>
         </p:nvSpPr>
@@ -14310,7 +15617,7 @@
       </p:sp>
       <p:sp>
         <p:nvSpPr>
-          <p:cNvPr id="23" name="TextBox 22"/>
+          <p:cNvPr id="25" name="TextBox 24"/>
           <p:cNvSpPr txBox="1"/>
           <p:nvPr/>
         </p:nvSpPr>
@@ -14344,7 +15651,7 @@
       </p:sp>
       <p:sp>
         <p:nvSpPr>
-          <p:cNvPr id="24" name="TextBox 23"/>
+          <p:cNvPr id="26" name="TextBox 25"/>
           <p:cNvSpPr txBox="1"/>
           <p:nvPr/>
         </p:nvSpPr>
@@ -14768,7 +16075,111 @@
       </p:pic>
       <p:sp>
         <p:nvSpPr>
-          <p:cNvPr id="11" name="TextBox 10"/>
+          <p:cNvPr id="11" name="Rounded Rectangle 10"/>
+          <p:cNvSpPr/>
+          <p:nvPr/>
+        </p:nvSpPr>
+        <p:spPr>
+          <a:xfrm>
+            <a:off x="411479" y="1444752"/>
+            <a:ext cx="11368735" cy="4800600"/>
+          </a:xfrm>
+          <a:prstGeom prst="roundRect">
+            <a:avLst>
+              <a:gd name="adj" fmla="val 4000"/>
+            </a:avLst>
+          </a:prstGeom>
+          <a:solidFill>
+            <a:srgbClr val="FFFFFF">
+              <a:alpha val="84000"/>
+            </a:srgbClr>
+          </a:solidFill>
+          <a:ln w="19050">
+            <a:solidFill>
+              <a:srgbClr val="FFFFFF"/>
+            </a:solidFill>
+          </a:ln>
+          <a:effectLst>
+            <a:outerShdw blurRad="203200" dist="50800" dir="5400000" algn="t" rotWithShape="0">
+              <a:srgbClr val="1A2340">
+                <a:alpha val="20000"/>
+              </a:srgbClr>
+            </a:outerShdw>
+          </a:effectLst>
+        </p:spPr>
+        <p:style>
+          <a:lnRef idx="1">
+            <a:schemeClr val="accent1"/>
+          </a:lnRef>
+          <a:fillRef idx="3">
+            <a:schemeClr val="accent1"/>
+          </a:fillRef>
+          <a:effectRef idx="2">
+            <a:schemeClr val="accent1"/>
+          </a:effectRef>
+          <a:fontRef idx="minor">
+            <a:schemeClr val="lt1"/>
+          </a:fontRef>
+        </p:style>
+        <p:txBody>
+          <a:bodyPr rtlCol="0" anchor="ctr"/>
+          <a:lstStyle/>
+          <a:p>
+            <a:pPr algn="ctr"/>
+          </a:p>
+        </p:txBody>
+      </p:sp>
+      <p:sp>
+        <p:nvSpPr>
+          <p:cNvPr id="12" name="Rounded Rectangle 11"/>
+          <p:cNvSpPr/>
+          <p:nvPr/>
+        </p:nvSpPr>
+        <p:spPr>
+          <a:xfrm>
+            <a:off x="731519" y="1508760"/>
+            <a:ext cx="10728655" cy="32004"/>
+          </a:xfrm>
+          <a:prstGeom prst="roundRect">
+            <a:avLst>
+              <a:gd name="adj" fmla="val 50000"/>
+            </a:avLst>
+          </a:prstGeom>
+          <a:solidFill>
+            <a:srgbClr val="FFFFFF">
+              <a:alpha val="85000"/>
+            </a:srgbClr>
+          </a:solidFill>
+          <a:ln>
+            <a:noFill/>
+          </a:ln>
+          <a:effectLst/>
+        </p:spPr>
+        <p:style>
+          <a:lnRef idx="1">
+            <a:schemeClr val="accent1"/>
+          </a:lnRef>
+          <a:fillRef idx="3">
+            <a:schemeClr val="accent1"/>
+          </a:fillRef>
+          <a:effectRef idx="2">
+            <a:schemeClr val="accent1"/>
+          </a:effectRef>
+          <a:fontRef idx="minor">
+            <a:schemeClr val="lt1"/>
+          </a:fontRef>
+        </p:style>
+        <p:txBody>
+          <a:bodyPr rtlCol="0" anchor="ctr"/>
+          <a:lstStyle/>
+          <a:p>
+            <a:pPr algn="ctr"/>
+          </a:p>
+        </p:txBody>
+      </p:sp>
+      <p:sp>
+        <p:nvSpPr>
+          <p:cNvPr id="13" name="TextBox 12"/>
           <p:cNvSpPr txBox="1"/>
           <p:nvPr/>
         </p:nvSpPr>
@@ -14802,7 +16213,7 @@
       </p:sp>
       <p:sp>
         <p:nvSpPr>
-          <p:cNvPr id="12" name="Rounded Rectangle 11"/>
+          <p:cNvPr id="14" name="Rounded Rectangle 13"/>
           <p:cNvSpPr/>
           <p:nvPr/>
         </p:nvSpPr>
@@ -14858,7 +16269,7 @@
       </p:sp>
       <p:sp>
         <p:nvSpPr>
-          <p:cNvPr id="13" name="Oval 12"/>
+          <p:cNvPr id="15" name="Oval 14"/>
           <p:cNvSpPr/>
           <p:nvPr/>
         </p:nvSpPr>
@@ -14911,7 +16322,7 @@
       </p:sp>
       <p:sp>
         <p:nvSpPr>
-          <p:cNvPr id="14" name="TextBox 13"/>
+          <p:cNvPr id="16" name="TextBox 15"/>
           <p:cNvSpPr txBox="1"/>
           <p:nvPr/>
         </p:nvSpPr>
@@ -14945,7 +16356,7 @@
       </p:sp>
       <p:sp>
         <p:nvSpPr>
-          <p:cNvPr id="15" name="Rounded Rectangle 14"/>
+          <p:cNvPr id="17" name="Rounded Rectangle 16"/>
           <p:cNvSpPr/>
           <p:nvPr/>
         </p:nvSpPr>
@@ -15001,7 +16412,7 @@
       </p:sp>
       <p:sp>
         <p:nvSpPr>
-          <p:cNvPr id="16" name="Oval 15"/>
+          <p:cNvPr id="18" name="Oval 17"/>
           <p:cNvSpPr/>
           <p:nvPr/>
         </p:nvSpPr>
@@ -15054,7 +16465,7 @@
       </p:sp>
       <p:sp>
         <p:nvSpPr>
-          <p:cNvPr id="17" name="TextBox 16"/>
+          <p:cNvPr id="19" name="TextBox 18"/>
           <p:cNvSpPr txBox="1"/>
           <p:nvPr/>
         </p:nvSpPr>
@@ -15088,7 +16499,7 @@
       </p:sp>
       <p:sp>
         <p:nvSpPr>
-          <p:cNvPr id="18" name="Rounded Rectangle 17"/>
+          <p:cNvPr id="20" name="Rounded Rectangle 19"/>
           <p:cNvSpPr/>
           <p:nvPr/>
         </p:nvSpPr>
@@ -15144,7 +16555,7 @@
       </p:sp>
       <p:sp>
         <p:nvSpPr>
-          <p:cNvPr id="19" name="Oval 18"/>
+          <p:cNvPr id="21" name="Oval 20"/>
           <p:cNvSpPr/>
           <p:nvPr/>
         </p:nvSpPr>
@@ -15197,7 +16608,7 @@
       </p:sp>
       <p:sp>
         <p:nvSpPr>
-          <p:cNvPr id="20" name="TextBox 19"/>
+          <p:cNvPr id="22" name="TextBox 21"/>
           <p:cNvSpPr txBox="1"/>
           <p:nvPr/>
         </p:nvSpPr>
@@ -15231,7 +16642,7 @@
       </p:sp>
       <p:sp>
         <p:nvSpPr>
-          <p:cNvPr id="21" name="Rounded Rectangle 20"/>
+          <p:cNvPr id="23" name="Rounded Rectangle 22"/>
           <p:cNvSpPr/>
           <p:nvPr/>
         </p:nvSpPr>
@@ -15287,7 +16698,7 @@
       </p:sp>
       <p:sp>
         <p:nvSpPr>
-          <p:cNvPr id="22" name="Oval 21"/>
+          <p:cNvPr id="24" name="Oval 23"/>
           <p:cNvSpPr/>
           <p:nvPr/>
         </p:nvSpPr>
@@ -15340,7 +16751,7 @@
       </p:sp>
       <p:sp>
         <p:nvSpPr>
-          <p:cNvPr id="23" name="TextBox 22"/>
+          <p:cNvPr id="25" name="TextBox 24"/>
           <p:cNvSpPr txBox="1"/>
           <p:nvPr/>
         </p:nvSpPr>
@@ -15755,7 +17166,111 @@
       </p:pic>
       <p:sp>
         <p:nvSpPr>
-          <p:cNvPr id="11" name="TextBox 10"/>
+          <p:cNvPr id="11" name="Rounded Rectangle 10"/>
+          <p:cNvSpPr/>
+          <p:nvPr/>
+        </p:nvSpPr>
+        <p:spPr>
+          <a:xfrm>
+            <a:off x="411479" y="1444752"/>
+            <a:ext cx="11368735" cy="4800600"/>
+          </a:xfrm>
+          <a:prstGeom prst="roundRect">
+            <a:avLst>
+              <a:gd name="adj" fmla="val 4000"/>
+            </a:avLst>
+          </a:prstGeom>
+          <a:solidFill>
+            <a:srgbClr val="FFFFFF">
+              <a:alpha val="84000"/>
+            </a:srgbClr>
+          </a:solidFill>
+          <a:ln w="19050">
+            <a:solidFill>
+              <a:srgbClr val="FFFFFF"/>
+            </a:solidFill>
+          </a:ln>
+          <a:effectLst>
+            <a:outerShdw blurRad="203200" dist="50800" dir="5400000" algn="t" rotWithShape="0">
+              <a:srgbClr val="1A2340">
+                <a:alpha val="20000"/>
+              </a:srgbClr>
+            </a:outerShdw>
+          </a:effectLst>
+        </p:spPr>
+        <p:style>
+          <a:lnRef idx="1">
+            <a:schemeClr val="accent1"/>
+          </a:lnRef>
+          <a:fillRef idx="3">
+            <a:schemeClr val="accent1"/>
+          </a:fillRef>
+          <a:effectRef idx="2">
+            <a:schemeClr val="accent1"/>
+          </a:effectRef>
+          <a:fontRef idx="minor">
+            <a:schemeClr val="lt1"/>
+          </a:fontRef>
+        </p:style>
+        <p:txBody>
+          <a:bodyPr rtlCol="0" anchor="ctr"/>
+          <a:lstStyle/>
+          <a:p>
+            <a:pPr algn="ctr"/>
+          </a:p>
+        </p:txBody>
+      </p:sp>
+      <p:sp>
+        <p:nvSpPr>
+          <p:cNvPr id="12" name="Rounded Rectangle 11"/>
+          <p:cNvSpPr/>
+          <p:nvPr/>
+        </p:nvSpPr>
+        <p:spPr>
+          <a:xfrm>
+            <a:off x="731519" y="1508760"/>
+            <a:ext cx="10728655" cy="32004"/>
+          </a:xfrm>
+          <a:prstGeom prst="roundRect">
+            <a:avLst>
+              <a:gd name="adj" fmla="val 50000"/>
+            </a:avLst>
+          </a:prstGeom>
+          <a:solidFill>
+            <a:srgbClr val="FFFFFF">
+              <a:alpha val="85000"/>
+            </a:srgbClr>
+          </a:solidFill>
+          <a:ln>
+            <a:noFill/>
+          </a:ln>
+          <a:effectLst/>
+        </p:spPr>
+        <p:style>
+          <a:lnRef idx="1">
+            <a:schemeClr val="accent1"/>
+          </a:lnRef>
+          <a:fillRef idx="3">
+            <a:schemeClr val="accent1"/>
+          </a:fillRef>
+          <a:effectRef idx="2">
+            <a:schemeClr val="accent1"/>
+          </a:effectRef>
+          <a:fontRef idx="minor">
+            <a:schemeClr val="lt1"/>
+          </a:fontRef>
+        </p:style>
+        <p:txBody>
+          <a:bodyPr rtlCol="0" anchor="ctr"/>
+          <a:lstStyle/>
+          <a:p>
+            <a:pPr algn="ctr"/>
+          </a:p>
+        </p:txBody>
+      </p:sp>
+      <p:sp>
+        <p:nvSpPr>
+          <p:cNvPr id="13" name="TextBox 12"/>
           <p:cNvSpPr txBox="1"/>
           <p:nvPr/>
         </p:nvSpPr>
@@ -15789,7 +17304,7 @@
       </p:sp>
       <p:sp>
         <p:nvSpPr>
-          <p:cNvPr id="12" name="Rounded Rectangle 11"/>
+          <p:cNvPr id="14" name="Rounded Rectangle 13"/>
           <p:cNvSpPr/>
           <p:nvPr/>
         </p:nvSpPr>
@@ -15848,7 +17363,7 @@
       </p:sp>
       <p:sp>
         <p:nvSpPr>
-          <p:cNvPr id="13" name="Oval 12"/>
+          <p:cNvPr id="15" name="Oval 14"/>
           <p:cNvSpPr/>
           <p:nvPr/>
         </p:nvSpPr>
@@ -15901,7 +17416,7 @@
       </p:sp>
       <p:sp>
         <p:nvSpPr>
-          <p:cNvPr id="14" name="TextBox 13"/>
+          <p:cNvPr id="16" name="TextBox 15"/>
           <p:cNvSpPr txBox="1"/>
           <p:nvPr/>
         </p:nvSpPr>
@@ -15935,7 +17450,7 @@
       </p:sp>
       <p:sp>
         <p:nvSpPr>
-          <p:cNvPr id="15" name="Rounded Rectangle 14"/>
+          <p:cNvPr id="17" name="Rounded Rectangle 16"/>
           <p:cNvSpPr/>
           <p:nvPr/>
         </p:nvSpPr>
@@ -15991,7 +17506,7 @@
       </p:sp>
       <p:sp>
         <p:nvSpPr>
-          <p:cNvPr id="16" name="Oval 15"/>
+          <p:cNvPr id="18" name="Oval 17"/>
           <p:cNvSpPr/>
           <p:nvPr/>
         </p:nvSpPr>
@@ -16044,7 +17559,7 @@
       </p:sp>
       <p:sp>
         <p:nvSpPr>
-          <p:cNvPr id="17" name="TextBox 16"/>
+          <p:cNvPr id="19" name="TextBox 18"/>
           <p:cNvSpPr txBox="1"/>
           <p:nvPr/>
         </p:nvSpPr>
@@ -16078,7 +17593,7 @@
       </p:sp>
       <p:sp>
         <p:nvSpPr>
-          <p:cNvPr id="18" name="Rounded Rectangle 17"/>
+          <p:cNvPr id="20" name="Rounded Rectangle 19"/>
           <p:cNvSpPr/>
           <p:nvPr/>
         </p:nvSpPr>
@@ -16134,7 +17649,7 @@
       </p:sp>
       <p:sp>
         <p:nvSpPr>
-          <p:cNvPr id="19" name="Oval 18"/>
+          <p:cNvPr id="21" name="Oval 20"/>
           <p:cNvSpPr/>
           <p:nvPr/>
         </p:nvSpPr>
@@ -16187,7 +17702,7 @@
       </p:sp>
       <p:sp>
         <p:nvSpPr>
-          <p:cNvPr id="20" name="TextBox 19"/>
+          <p:cNvPr id="22" name="TextBox 21"/>
           <p:cNvSpPr txBox="1"/>
           <p:nvPr/>
         </p:nvSpPr>
@@ -16221,7 +17736,7 @@
       </p:sp>
       <p:sp>
         <p:nvSpPr>
-          <p:cNvPr id="21" name="Rounded Rectangle 20"/>
+          <p:cNvPr id="23" name="Rounded Rectangle 22"/>
           <p:cNvSpPr/>
           <p:nvPr/>
         </p:nvSpPr>
@@ -16277,7 +17792,7 @@
       </p:sp>
       <p:sp>
         <p:nvSpPr>
-          <p:cNvPr id="22" name="Oval 21"/>
+          <p:cNvPr id="24" name="Oval 23"/>
           <p:cNvSpPr/>
           <p:nvPr/>
         </p:nvSpPr>
@@ -16330,7 +17845,7 @@
       </p:sp>
       <p:sp>
         <p:nvSpPr>
-          <p:cNvPr id="23" name="TextBox 22"/>
+          <p:cNvPr id="25" name="TextBox 24"/>
           <p:cNvSpPr txBox="1"/>
           <p:nvPr/>
         </p:nvSpPr>
@@ -16364,7 +17879,7 @@
       </p:sp>
       <p:sp>
         <p:nvSpPr>
-          <p:cNvPr id="24" name="TextBox 23"/>
+          <p:cNvPr id="26" name="TextBox 25"/>
           <p:cNvSpPr txBox="1"/>
           <p:nvPr/>
         </p:nvSpPr>
@@ -16788,7 +18303,111 @@
       </p:pic>
       <p:sp>
         <p:nvSpPr>
-          <p:cNvPr id="11" name="TextBox 10"/>
+          <p:cNvPr id="11" name="Rounded Rectangle 10"/>
+          <p:cNvSpPr/>
+          <p:nvPr/>
+        </p:nvSpPr>
+        <p:spPr>
+          <a:xfrm>
+            <a:off x="411479" y="1444752"/>
+            <a:ext cx="11368735" cy="4800600"/>
+          </a:xfrm>
+          <a:prstGeom prst="roundRect">
+            <a:avLst>
+              <a:gd name="adj" fmla="val 4000"/>
+            </a:avLst>
+          </a:prstGeom>
+          <a:solidFill>
+            <a:srgbClr val="FFFFFF">
+              <a:alpha val="84000"/>
+            </a:srgbClr>
+          </a:solidFill>
+          <a:ln w="19050">
+            <a:solidFill>
+              <a:srgbClr val="FFFFFF"/>
+            </a:solidFill>
+          </a:ln>
+          <a:effectLst>
+            <a:outerShdw blurRad="203200" dist="50800" dir="5400000" algn="t" rotWithShape="0">
+              <a:srgbClr val="1A2340">
+                <a:alpha val="20000"/>
+              </a:srgbClr>
+            </a:outerShdw>
+          </a:effectLst>
+        </p:spPr>
+        <p:style>
+          <a:lnRef idx="1">
+            <a:schemeClr val="accent1"/>
+          </a:lnRef>
+          <a:fillRef idx="3">
+            <a:schemeClr val="accent1"/>
+          </a:fillRef>
+          <a:effectRef idx="2">
+            <a:schemeClr val="accent1"/>
+          </a:effectRef>
+          <a:fontRef idx="minor">
+            <a:schemeClr val="lt1"/>
+          </a:fontRef>
+        </p:style>
+        <p:txBody>
+          <a:bodyPr rtlCol="0" anchor="ctr"/>
+          <a:lstStyle/>
+          <a:p>
+            <a:pPr algn="ctr"/>
+          </a:p>
+        </p:txBody>
+      </p:sp>
+      <p:sp>
+        <p:nvSpPr>
+          <p:cNvPr id="12" name="Rounded Rectangle 11"/>
+          <p:cNvSpPr/>
+          <p:nvPr/>
+        </p:nvSpPr>
+        <p:spPr>
+          <a:xfrm>
+            <a:off x="731519" y="1508760"/>
+            <a:ext cx="10728655" cy="32004"/>
+          </a:xfrm>
+          <a:prstGeom prst="roundRect">
+            <a:avLst>
+              <a:gd name="adj" fmla="val 50000"/>
+            </a:avLst>
+          </a:prstGeom>
+          <a:solidFill>
+            <a:srgbClr val="FFFFFF">
+              <a:alpha val="85000"/>
+            </a:srgbClr>
+          </a:solidFill>
+          <a:ln>
+            <a:noFill/>
+          </a:ln>
+          <a:effectLst/>
+        </p:spPr>
+        <p:style>
+          <a:lnRef idx="1">
+            <a:schemeClr val="accent1"/>
+          </a:lnRef>
+          <a:fillRef idx="3">
+            <a:schemeClr val="accent1"/>
+          </a:fillRef>
+          <a:effectRef idx="2">
+            <a:schemeClr val="accent1"/>
+          </a:effectRef>
+          <a:fontRef idx="minor">
+            <a:schemeClr val="lt1"/>
+          </a:fontRef>
+        </p:style>
+        <p:txBody>
+          <a:bodyPr rtlCol="0" anchor="ctr"/>
+          <a:lstStyle/>
+          <a:p>
+            <a:pPr algn="ctr"/>
+          </a:p>
+        </p:txBody>
+      </p:sp>
+      <p:sp>
+        <p:nvSpPr>
+          <p:cNvPr id="13" name="TextBox 12"/>
           <p:cNvSpPr txBox="1"/>
           <p:nvPr/>
         </p:nvSpPr>
@@ -16822,7 +18441,7 @@
       </p:sp>
       <p:sp>
         <p:nvSpPr>
-          <p:cNvPr id="12" name="Rounded Rectangle 11"/>
+          <p:cNvPr id="14" name="Rounded Rectangle 13"/>
           <p:cNvSpPr/>
           <p:nvPr/>
         </p:nvSpPr>
@@ -16878,7 +18497,7 @@
       </p:sp>
       <p:sp>
         <p:nvSpPr>
-          <p:cNvPr id="13" name="Oval 12"/>
+          <p:cNvPr id="15" name="Oval 14"/>
           <p:cNvSpPr/>
           <p:nvPr/>
         </p:nvSpPr>
@@ -16931,7 +18550,7 @@
       </p:sp>
       <p:sp>
         <p:nvSpPr>
-          <p:cNvPr id="14" name="TextBox 13"/>
+          <p:cNvPr id="16" name="TextBox 15"/>
           <p:cNvSpPr txBox="1"/>
           <p:nvPr/>
         </p:nvSpPr>
@@ -16965,7 +18584,7 @@
       </p:sp>
       <p:sp>
         <p:nvSpPr>
-          <p:cNvPr id="15" name="Rounded Rectangle 14"/>
+          <p:cNvPr id="17" name="Rounded Rectangle 16"/>
           <p:cNvSpPr/>
           <p:nvPr/>
         </p:nvSpPr>
@@ -17021,7 +18640,7 @@
       </p:sp>
       <p:sp>
         <p:nvSpPr>
-          <p:cNvPr id="16" name="Oval 15"/>
+          <p:cNvPr id="18" name="Oval 17"/>
           <p:cNvSpPr/>
           <p:nvPr/>
         </p:nvSpPr>
@@ -17074,7 +18693,7 @@
       </p:sp>
       <p:sp>
         <p:nvSpPr>
-          <p:cNvPr id="17" name="TextBox 16"/>
+          <p:cNvPr id="19" name="TextBox 18"/>
           <p:cNvSpPr txBox="1"/>
           <p:nvPr/>
         </p:nvSpPr>
@@ -17108,7 +18727,7 @@
       </p:sp>
       <p:sp>
         <p:nvSpPr>
-          <p:cNvPr id="18" name="Rounded Rectangle 17"/>
+          <p:cNvPr id="20" name="Rounded Rectangle 19"/>
           <p:cNvSpPr/>
           <p:nvPr/>
         </p:nvSpPr>
@@ -17164,7 +18783,7 @@
       </p:sp>
       <p:sp>
         <p:nvSpPr>
-          <p:cNvPr id="19" name="Oval 18"/>
+          <p:cNvPr id="21" name="Oval 20"/>
           <p:cNvSpPr/>
           <p:nvPr/>
         </p:nvSpPr>
@@ -17217,7 +18836,7 @@
       </p:sp>
       <p:sp>
         <p:nvSpPr>
-          <p:cNvPr id="20" name="TextBox 19"/>
+          <p:cNvPr id="22" name="TextBox 21"/>
           <p:cNvSpPr txBox="1"/>
           <p:nvPr/>
         </p:nvSpPr>
@@ -17251,7 +18870,7 @@
       </p:sp>
       <p:sp>
         <p:nvSpPr>
-          <p:cNvPr id="21" name="Rounded Rectangle 20"/>
+          <p:cNvPr id="23" name="Rounded Rectangle 22"/>
           <p:cNvSpPr/>
           <p:nvPr/>
         </p:nvSpPr>
@@ -17307,7 +18926,7 @@
       </p:sp>
       <p:sp>
         <p:nvSpPr>
-          <p:cNvPr id="22" name="Oval 21"/>
+          <p:cNvPr id="24" name="Oval 23"/>
           <p:cNvSpPr/>
           <p:nvPr/>
         </p:nvSpPr>
@@ -17360,7 +18979,7 @@
       </p:sp>
       <p:sp>
         <p:nvSpPr>
-          <p:cNvPr id="23" name="TextBox 22"/>
+          <p:cNvPr id="25" name="TextBox 24"/>
           <p:cNvSpPr txBox="1"/>
           <p:nvPr/>
         </p:nvSpPr>
@@ -17775,7 +19394,111 @@
       </p:pic>
       <p:sp>
         <p:nvSpPr>
-          <p:cNvPr id="11" name="TextBox 10"/>
+          <p:cNvPr id="11" name="Rounded Rectangle 10"/>
+          <p:cNvSpPr/>
+          <p:nvPr/>
+        </p:nvSpPr>
+        <p:spPr>
+          <a:xfrm>
+            <a:off x="411479" y="1444752"/>
+            <a:ext cx="11368735" cy="4800600"/>
+          </a:xfrm>
+          <a:prstGeom prst="roundRect">
+            <a:avLst>
+              <a:gd name="adj" fmla="val 4000"/>
+            </a:avLst>
+          </a:prstGeom>
+          <a:solidFill>
+            <a:srgbClr val="FFFFFF">
+              <a:alpha val="84000"/>
+            </a:srgbClr>
+          </a:solidFill>
+          <a:ln w="19050">
+            <a:solidFill>
+              <a:srgbClr val="FFFFFF"/>
+            </a:solidFill>
+          </a:ln>
+          <a:effectLst>
+            <a:outerShdw blurRad="203200" dist="50800" dir="5400000" algn="t" rotWithShape="0">
+              <a:srgbClr val="1A2340">
+                <a:alpha val="20000"/>
+              </a:srgbClr>
+            </a:outerShdw>
+          </a:effectLst>
+        </p:spPr>
+        <p:style>
+          <a:lnRef idx="1">
+            <a:schemeClr val="accent1"/>
+          </a:lnRef>
+          <a:fillRef idx="3">
+            <a:schemeClr val="accent1"/>
+          </a:fillRef>
+          <a:effectRef idx="2">
+            <a:schemeClr val="accent1"/>
+          </a:effectRef>
+          <a:fontRef idx="minor">
+            <a:schemeClr val="lt1"/>
+          </a:fontRef>
+        </p:style>
+        <p:txBody>
+          <a:bodyPr rtlCol="0" anchor="ctr"/>
+          <a:lstStyle/>
+          <a:p>
+            <a:pPr algn="ctr"/>
+          </a:p>
+        </p:txBody>
+      </p:sp>
+      <p:sp>
+        <p:nvSpPr>
+          <p:cNvPr id="12" name="Rounded Rectangle 11"/>
+          <p:cNvSpPr/>
+          <p:nvPr/>
+        </p:nvSpPr>
+        <p:spPr>
+          <a:xfrm>
+            <a:off x="731519" y="1508760"/>
+            <a:ext cx="10728655" cy="32004"/>
+          </a:xfrm>
+          <a:prstGeom prst="roundRect">
+            <a:avLst>
+              <a:gd name="adj" fmla="val 50000"/>
+            </a:avLst>
+          </a:prstGeom>
+          <a:solidFill>
+            <a:srgbClr val="FFFFFF">
+              <a:alpha val="85000"/>
+            </a:srgbClr>
+          </a:solidFill>
+          <a:ln>
+            <a:noFill/>
+          </a:ln>
+          <a:effectLst/>
+        </p:spPr>
+        <p:style>
+          <a:lnRef idx="1">
+            <a:schemeClr val="accent1"/>
+          </a:lnRef>
+          <a:fillRef idx="3">
+            <a:schemeClr val="accent1"/>
+          </a:fillRef>
+          <a:effectRef idx="2">
+            <a:schemeClr val="accent1"/>
+          </a:effectRef>
+          <a:fontRef idx="minor">
+            <a:schemeClr val="lt1"/>
+          </a:fontRef>
+        </p:style>
+        <p:txBody>
+          <a:bodyPr rtlCol="0" anchor="ctr"/>
+          <a:lstStyle/>
+          <a:p>
+            <a:pPr algn="ctr"/>
+          </a:p>
+        </p:txBody>
+      </p:sp>
+      <p:sp>
+        <p:nvSpPr>
+          <p:cNvPr id="13" name="TextBox 12"/>
           <p:cNvSpPr txBox="1"/>
           <p:nvPr/>
         </p:nvSpPr>
@@ -17809,7 +19532,7 @@
       </p:sp>
       <p:sp>
         <p:nvSpPr>
-          <p:cNvPr id="12" name="Rounded Rectangle 11"/>
+          <p:cNvPr id="14" name="Rounded Rectangle 13"/>
           <p:cNvSpPr/>
           <p:nvPr/>
         </p:nvSpPr>
@@ -17865,7 +19588,7 @@
       </p:sp>
       <p:sp>
         <p:nvSpPr>
-          <p:cNvPr id="13" name="Oval 12"/>
+          <p:cNvPr id="15" name="Oval 14"/>
           <p:cNvSpPr/>
           <p:nvPr/>
         </p:nvSpPr>
@@ -17918,7 +19641,7 @@
       </p:sp>
       <p:sp>
         <p:nvSpPr>
-          <p:cNvPr id="14" name="TextBox 13"/>
+          <p:cNvPr id="16" name="TextBox 15"/>
           <p:cNvSpPr txBox="1"/>
           <p:nvPr/>
         </p:nvSpPr>
@@ -17952,7 +19675,7 @@
       </p:sp>
       <p:sp>
         <p:nvSpPr>
-          <p:cNvPr id="15" name="Rounded Rectangle 14"/>
+          <p:cNvPr id="17" name="Rounded Rectangle 16"/>
           <p:cNvSpPr/>
           <p:nvPr/>
         </p:nvSpPr>
@@ -18008,7 +19731,7 @@
       </p:sp>
       <p:sp>
         <p:nvSpPr>
-          <p:cNvPr id="16" name="Oval 15"/>
+          <p:cNvPr id="18" name="Oval 17"/>
           <p:cNvSpPr/>
           <p:nvPr/>
         </p:nvSpPr>
@@ -18061,7 +19784,7 @@
       </p:sp>
       <p:sp>
         <p:nvSpPr>
-          <p:cNvPr id="17" name="TextBox 16"/>
+          <p:cNvPr id="19" name="TextBox 18"/>
           <p:cNvSpPr txBox="1"/>
           <p:nvPr/>
         </p:nvSpPr>
@@ -18095,7 +19818,7 @@
       </p:sp>
       <p:sp>
         <p:nvSpPr>
-          <p:cNvPr id="18" name="Rounded Rectangle 17"/>
+          <p:cNvPr id="20" name="Rounded Rectangle 19"/>
           <p:cNvSpPr/>
           <p:nvPr/>
         </p:nvSpPr>
@@ -18154,7 +19877,7 @@
       </p:sp>
       <p:sp>
         <p:nvSpPr>
-          <p:cNvPr id="19" name="Oval 18"/>
+          <p:cNvPr id="21" name="Oval 20"/>
           <p:cNvSpPr/>
           <p:nvPr/>
         </p:nvSpPr>
@@ -18207,7 +19930,7 @@
       </p:sp>
       <p:sp>
         <p:nvSpPr>
-          <p:cNvPr id="20" name="TextBox 19"/>
+          <p:cNvPr id="22" name="TextBox 21"/>
           <p:cNvSpPr txBox="1"/>
           <p:nvPr/>
         </p:nvSpPr>
@@ -18241,7 +19964,7 @@
       </p:sp>
       <p:sp>
         <p:nvSpPr>
-          <p:cNvPr id="21" name="Rounded Rectangle 20"/>
+          <p:cNvPr id="23" name="Rounded Rectangle 22"/>
           <p:cNvSpPr/>
           <p:nvPr/>
         </p:nvSpPr>
@@ -18297,7 +20020,7 @@
       </p:sp>
       <p:sp>
         <p:nvSpPr>
-          <p:cNvPr id="22" name="Oval 21"/>
+          <p:cNvPr id="24" name="Oval 23"/>
           <p:cNvSpPr/>
           <p:nvPr/>
         </p:nvSpPr>
@@ -18350,7 +20073,7 @@
       </p:sp>
       <p:sp>
         <p:nvSpPr>
-          <p:cNvPr id="23" name="TextBox 22"/>
+          <p:cNvPr id="25" name="TextBox 24"/>
           <p:cNvSpPr txBox="1"/>
           <p:nvPr/>
         </p:nvSpPr>
@@ -18384,7 +20107,7 @@
       </p:sp>
       <p:sp>
         <p:nvSpPr>
-          <p:cNvPr id="24" name="TextBox 23"/>
+          <p:cNvPr id="26" name="TextBox 25"/>
           <p:cNvSpPr txBox="1"/>
           <p:nvPr/>
         </p:nvSpPr>
@@ -19496,7 +21219,111 @@
       </p:pic>
       <p:sp>
         <p:nvSpPr>
-          <p:cNvPr id="11" name="Oval 10"/>
+          <p:cNvPr id="11" name="Rounded Rectangle 10"/>
+          <p:cNvSpPr/>
+          <p:nvPr/>
+        </p:nvSpPr>
+        <p:spPr>
+          <a:xfrm>
+            <a:off x="411479" y="1444752"/>
+            <a:ext cx="11368735" cy="4800600"/>
+          </a:xfrm>
+          <a:prstGeom prst="roundRect">
+            <a:avLst>
+              <a:gd name="adj" fmla="val 4000"/>
+            </a:avLst>
+          </a:prstGeom>
+          <a:solidFill>
+            <a:srgbClr val="FFFFFF">
+              <a:alpha val="84000"/>
+            </a:srgbClr>
+          </a:solidFill>
+          <a:ln w="19050">
+            <a:solidFill>
+              <a:srgbClr val="FFFFFF"/>
+            </a:solidFill>
+          </a:ln>
+          <a:effectLst>
+            <a:outerShdw blurRad="203200" dist="50800" dir="5400000" algn="t" rotWithShape="0">
+              <a:srgbClr val="1A2340">
+                <a:alpha val="20000"/>
+              </a:srgbClr>
+            </a:outerShdw>
+          </a:effectLst>
+        </p:spPr>
+        <p:style>
+          <a:lnRef idx="1">
+            <a:schemeClr val="accent1"/>
+          </a:lnRef>
+          <a:fillRef idx="3">
+            <a:schemeClr val="accent1"/>
+          </a:fillRef>
+          <a:effectRef idx="2">
+            <a:schemeClr val="accent1"/>
+          </a:effectRef>
+          <a:fontRef idx="minor">
+            <a:schemeClr val="lt1"/>
+          </a:fontRef>
+        </p:style>
+        <p:txBody>
+          <a:bodyPr rtlCol="0" anchor="ctr"/>
+          <a:lstStyle/>
+          <a:p>
+            <a:pPr algn="ctr"/>
+          </a:p>
+        </p:txBody>
+      </p:sp>
+      <p:sp>
+        <p:nvSpPr>
+          <p:cNvPr id="12" name="Rounded Rectangle 11"/>
+          <p:cNvSpPr/>
+          <p:nvPr/>
+        </p:nvSpPr>
+        <p:spPr>
+          <a:xfrm>
+            <a:off x="731519" y="1508760"/>
+            <a:ext cx="10728655" cy="32004"/>
+          </a:xfrm>
+          <a:prstGeom prst="roundRect">
+            <a:avLst>
+              <a:gd name="adj" fmla="val 50000"/>
+            </a:avLst>
+          </a:prstGeom>
+          <a:solidFill>
+            <a:srgbClr val="FFFFFF">
+              <a:alpha val="85000"/>
+            </a:srgbClr>
+          </a:solidFill>
+          <a:ln>
+            <a:noFill/>
+          </a:ln>
+          <a:effectLst/>
+        </p:spPr>
+        <p:style>
+          <a:lnRef idx="1">
+            <a:schemeClr val="accent1"/>
+          </a:lnRef>
+          <a:fillRef idx="3">
+            <a:schemeClr val="accent1"/>
+          </a:fillRef>
+          <a:effectRef idx="2">
+            <a:schemeClr val="accent1"/>
+          </a:effectRef>
+          <a:fontRef idx="minor">
+            <a:schemeClr val="lt1"/>
+          </a:fontRef>
+        </p:style>
+        <p:txBody>
+          <a:bodyPr rtlCol="0" anchor="ctr"/>
+          <a:lstStyle/>
+          <a:p>
+            <a:pPr algn="ctr"/>
+          </a:p>
+        </p:txBody>
+      </p:sp>
+      <p:sp>
+        <p:nvSpPr>
+          <p:cNvPr id="13" name="Oval 12"/>
           <p:cNvSpPr/>
           <p:nvPr/>
         </p:nvSpPr>
@@ -19549,7 +21376,7 @@
       </p:sp>
       <p:sp>
         <p:nvSpPr>
-          <p:cNvPr id="12" name="TextBox 11"/>
+          <p:cNvPr id="14" name="TextBox 13"/>
           <p:cNvSpPr txBox="1"/>
           <p:nvPr/>
         </p:nvSpPr>
@@ -19583,7 +21410,7 @@
       </p:sp>
       <p:sp>
         <p:nvSpPr>
-          <p:cNvPr id="13" name="Oval 12"/>
+          <p:cNvPr id="15" name="Oval 14"/>
           <p:cNvSpPr/>
           <p:nvPr/>
         </p:nvSpPr>
@@ -19636,7 +21463,7 @@
       </p:sp>
       <p:sp>
         <p:nvSpPr>
-          <p:cNvPr id="14" name="TextBox 13"/>
+          <p:cNvPr id="16" name="TextBox 15"/>
           <p:cNvSpPr txBox="1"/>
           <p:nvPr/>
         </p:nvSpPr>
@@ -19670,7 +21497,7 @@
       </p:sp>
       <p:sp>
         <p:nvSpPr>
-          <p:cNvPr id="15" name="Oval 14"/>
+          <p:cNvPr id="17" name="Oval 16"/>
           <p:cNvSpPr/>
           <p:nvPr/>
         </p:nvSpPr>
@@ -19723,7 +21550,7 @@
       </p:sp>
       <p:sp>
         <p:nvSpPr>
-          <p:cNvPr id="16" name="TextBox 15"/>
+          <p:cNvPr id="18" name="TextBox 17"/>
           <p:cNvSpPr txBox="1"/>
           <p:nvPr/>
         </p:nvSpPr>
@@ -19757,7 +21584,7 @@
       </p:sp>
       <p:sp>
         <p:nvSpPr>
-          <p:cNvPr id="17" name="Oval 16"/>
+          <p:cNvPr id="19" name="Oval 18"/>
           <p:cNvSpPr/>
           <p:nvPr/>
         </p:nvSpPr>
@@ -19810,7 +21637,7 @@
       </p:sp>
       <p:sp>
         <p:nvSpPr>
-          <p:cNvPr id="18" name="TextBox 17"/>
+          <p:cNvPr id="20" name="TextBox 19"/>
           <p:cNvSpPr txBox="1"/>
           <p:nvPr/>
         </p:nvSpPr>
@@ -19844,7 +21671,7 @@
       </p:sp>
       <p:sp>
         <p:nvSpPr>
-          <p:cNvPr id="19" name="Oval 18"/>
+          <p:cNvPr id="21" name="Oval 20"/>
           <p:cNvSpPr/>
           <p:nvPr/>
         </p:nvSpPr>
@@ -19897,7 +21724,7 @@
       </p:sp>
       <p:sp>
         <p:nvSpPr>
-          <p:cNvPr id="20" name="TextBox 19"/>
+          <p:cNvPr id="22" name="TextBox 21"/>
           <p:cNvSpPr txBox="1"/>
           <p:nvPr/>
         </p:nvSpPr>
@@ -19931,7 +21758,7 @@
       </p:sp>
       <p:sp>
         <p:nvSpPr>
-          <p:cNvPr id="21" name="Oval 20"/>
+          <p:cNvPr id="23" name="Oval 22"/>
           <p:cNvSpPr/>
           <p:nvPr/>
         </p:nvSpPr>
@@ -19984,7 +21811,7 @@
       </p:sp>
       <p:sp>
         <p:nvSpPr>
-          <p:cNvPr id="22" name="TextBox 21"/>
+          <p:cNvPr id="24" name="TextBox 23"/>
           <p:cNvSpPr txBox="1"/>
           <p:nvPr/>
         </p:nvSpPr>
@@ -20018,7 +21845,7 @@
       </p:sp>
       <p:sp>
         <p:nvSpPr>
-          <p:cNvPr id="23" name="Oval 22"/>
+          <p:cNvPr id="25" name="Oval 24"/>
           <p:cNvSpPr/>
           <p:nvPr/>
         </p:nvSpPr>
@@ -20071,7 +21898,7 @@
       </p:sp>
       <p:sp>
         <p:nvSpPr>
-          <p:cNvPr id="24" name="TextBox 23"/>
+          <p:cNvPr id="26" name="TextBox 25"/>
           <p:cNvSpPr txBox="1"/>
           <p:nvPr/>
         </p:nvSpPr>
@@ -20105,7 +21932,7 @@
       </p:sp>
       <p:sp>
         <p:nvSpPr>
-          <p:cNvPr id="25" name="Oval 24"/>
+          <p:cNvPr id="27" name="Oval 26"/>
           <p:cNvSpPr/>
           <p:nvPr/>
         </p:nvSpPr>
@@ -20158,7 +21985,7 @@
       </p:sp>
       <p:sp>
         <p:nvSpPr>
-          <p:cNvPr id="26" name="TextBox 25"/>
+          <p:cNvPr id="28" name="TextBox 27"/>
           <p:cNvSpPr txBox="1"/>
           <p:nvPr/>
         </p:nvSpPr>
@@ -20573,7 +22400,111 @@
       </p:pic>
       <p:sp>
         <p:nvSpPr>
-          <p:cNvPr id="11" name="Oval 10"/>
+          <p:cNvPr id="11" name="Rounded Rectangle 10"/>
+          <p:cNvSpPr/>
+          <p:nvPr/>
+        </p:nvSpPr>
+        <p:spPr>
+          <a:xfrm>
+            <a:off x="411479" y="1444752"/>
+            <a:ext cx="11368735" cy="4800600"/>
+          </a:xfrm>
+          <a:prstGeom prst="roundRect">
+            <a:avLst>
+              <a:gd name="adj" fmla="val 4000"/>
+            </a:avLst>
+          </a:prstGeom>
+          <a:solidFill>
+            <a:srgbClr val="FFFFFF">
+              <a:alpha val="84000"/>
+            </a:srgbClr>
+          </a:solidFill>
+          <a:ln w="19050">
+            <a:solidFill>
+              <a:srgbClr val="FFFFFF"/>
+            </a:solidFill>
+          </a:ln>
+          <a:effectLst>
+            <a:outerShdw blurRad="203200" dist="50800" dir="5400000" algn="t" rotWithShape="0">
+              <a:srgbClr val="1A2340">
+                <a:alpha val="20000"/>
+              </a:srgbClr>
+            </a:outerShdw>
+          </a:effectLst>
+        </p:spPr>
+        <p:style>
+          <a:lnRef idx="1">
+            <a:schemeClr val="accent1"/>
+          </a:lnRef>
+          <a:fillRef idx="3">
+            <a:schemeClr val="accent1"/>
+          </a:fillRef>
+          <a:effectRef idx="2">
+            <a:schemeClr val="accent1"/>
+          </a:effectRef>
+          <a:fontRef idx="minor">
+            <a:schemeClr val="lt1"/>
+          </a:fontRef>
+        </p:style>
+        <p:txBody>
+          <a:bodyPr rtlCol="0" anchor="ctr"/>
+          <a:lstStyle/>
+          <a:p>
+            <a:pPr algn="ctr"/>
+          </a:p>
+        </p:txBody>
+      </p:sp>
+      <p:sp>
+        <p:nvSpPr>
+          <p:cNvPr id="12" name="Rounded Rectangle 11"/>
+          <p:cNvSpPr/>
+          <p:nvPr/>
+        </p:nvSpPr>
+        <p:spPr>
+          <a:xfrm>
+            <a:off x="731519" y="1508760"/>
+            <a:ext cx="10728655" cy="32004"/>
+          </a:xfrm>
+          <a:prstGeom prst="roundRect">
+            <a:avLst>
+              <a:gd name="adj" fmla="val 50000"/>
+            </a:avLst>
+          </a:prstGeom>
+          <a:solidFill>
+            <a:srgbClr val="FFFFFF">
+              <a:alpha val="85000"/>
+            </a:srgbClr>
+          </a:solidFill>
+          <a:ln>
+            <a:noFill/>
+          </a:ln>
+          <a:effectLst/>
+        </p:spPr>
+        <p:style>
+          <a:lnRef idx="1">
+            <a:schemeClr val="accent1"/>
+          </a:lnRef>
+          <a:fillRef idx="3">
+            <a:schemeClr val="accent1"/>
+          </a:fillRef>
+          <a:effectRef idx="2">
+            <a:schemeClr val="accent1"/>
+          </a:effectRef>
+          <a:fontRef idx="minor">
+            <a:schemeClr val="lt1"/>
+          </a:fontRef>
+        </p:style>
+        <p:txBody>
+          <a:bodyPr rtlCol="0" anchor="ctr"/>
+          <a:lstStyle/>
+          <a:p>
+            <a:pPr algn="ctr"/>
+          </a:p>
+        </p:txBody>
+      </p:sp>
+      <p:sp>
+        <p:nvSpPr>
+          <p:cNvPr id="13" name="Oval 12"/>
           <p:cNvSpPr/>
           <p:nvPr/>
         </p:nvSpPr>
@@ -20626,7 +22557,7 @@
       </p:sp>
       <p:sp>
         <p:nvSpPr>
-          <p:cNvPr id="12" name="TextBox 11"/>
+          <p:cNvPr id="14" name="TextBox 13"/>
           <p:cNvSpPr txBox="1"/>
           <p:nvPr/>
         </p:nvSpPr>
@@ -20660,7 +22591,7 @@
       </p:sp>
       <p:sp>
         <p:nvSpPr>
-          <p:cNvPr id="13" name="Oval 12"/>
+          <p:cNvPr id="15" name="Oval 14"/>
           <p:cNvSpPr/>
           <p:nvPr/>
         </p:nvSpPr>
@@ -20713,7 +22644,7 @@
       </p:sp>
       <p:sp>
         <p:nvSpPr>
-          <p:cNvPr id="14" name="TextBox 13"/>
+          <p:cNvPr id="16" name="TextBox 15"/>
           <p:cNvSpPr txBox="1"/>
           <p:nvPr/>
         </p:nvSpPr>
@@ -20747,7 +22678,7 @@
       </p:sp>
       <p:sp>
         <p:nvSpPr>
-          <p:cNvPr id="15" name="Oval 14"/>
+          <p:cNvPr id="17" name="Oval 16"/>
           <p:cNvSpPr/>
           <p:nvPr/>
         </p:nvSpPr>
@@ -20800,7 +22731,7 @@
       </p:sp>
       <p:sp>
         <p:nvSpPr>
-          <p:cNvPr id="16" name="TextBox 15"/>
+          <p:cNvPr id="18" name="TextBox 17"/>
           <p:cNvSpPr txBox="1"/>
           <p:nvPr/>
         </p:nvSpPr>
@@ -20834,7 +22765,7 @@
       </p:sp>
       <p:sp>
         <p:nvSpPr>
-          <p:cNvPr id="17" name="Oval 16"/>
+          <p:cNvPr id="19" name="Oval 18"/>
           <p:cNvSpPr/>
           <p:nvPr/>
         </p:nvSpPr>
@@ -20887,7 +22818,7 @@
       </p:sp>
       <p:sp>
         <p:nvSpPr>
-          <p:cNvPr id="18" name="TextBox 17"/>
+          <p:cNvPr id="20" name="TextBox 19"/>
           <p:cNvSpPr txBox="1"/>
           <p:nvPr/>
         </p:nvSpPr>
@@ -21302,14 +23233,177 @@
       </p:pic>
       <p:sp>
         <p:nvSpPr>
-          <p:cNvPr id="11" name="TextBox 10"/>
+          <p:cNvPr id="11" name="Rounded Rectangle 10"/>
+          <p:cNvSpPr/>
+          <p:nvPr/>
+        </p:nvSpPr>
+        <p:spPr>
+          <a:xfrm>
+            <a:off x="411479" y="1444752"/>
+            <a:ext cx="11368735" cy="4800600"/>
+          </a:xfrm>
+          <a:prstGeom prst="roundRect">
+            <a:avLst>
+              <a:gd name="adj" fmla="val 4000"/>
+            </a:avLst>
+          </a:prstGeom>
+          <a:solidFill>
+            <a:srgbClr val="FFFFFF">
+              <a:alpha val="84000"/>
+            </a:srgbClr>
+          </a:solidFill>
+          <a:ln w="19050">
+            <a:solidFill>
+              <a:srgbClr val="FFFFFF"/>
+            </a:solidFill>
+          </a:ln>
+          <a:effectLst>
+            <a:outerShdw blurRad="203200" dist="50800" dir="5400000" algn="t" rotWithShape="0">
+              <a:srgbClr val="1A2340">
+                <a:alpha val="20000"/>
+              </a:srgbClr>
+            </a:outerShdw>
+          </a:effectLst>
+        </p:spPr>
+        <p:style>
+          <a:lnRef idx="1">
+            <a:schemeClr val="accent1"/>
+          </a:lnRef>
+          <a:fillRef idx="3">
+            <a:schemeClr val="accent1"/>
+          </a:fillRef>
+          <a:effectRef idx="2">
+            <a:schemeClr val="accent1"/>
+          </a:effectRef>
+          <a:fontRef idx="minor">
+            <a:schemeClr val="lt1"/>
+          </a:fontRef>
+        </p:style>
+        <p:txBody>
+          <a:bodyPr rtlCol="0" anchor="ctr"/>
+          <a:lstStyle/>
+          <a:p>
+            <a:pPr algn="ctr"/>
+          </a:p>
+        </p:txBody>
+      </p:sp>
+      <p:sp>
+        <p:nvSpPr>
+          <p:cNvPr id="12" name="Rounded Rectangle 11"/>
+          <p:cNvSpPr/>
+          <p:nvPr/>
+        </p:nvSpPr>
+        <p:spPr>
+          <a:xfrm>
+            <a:off x="731519" y="1508760"/>
+            <a:ext cx="10728655" cy="32004"/>
+          </a:xfrm>
+          <a:prstGeom prst="roundRect">
+            <a:avLst>
+              <a:gd name="adj" fmla="val 50000"/>
+            </a:avLst>
+          </a:prstGeom>
+          <a:solidFill>
+            <a:srgbClr val="FFFFFF">
+              <a:alpha val="85000"/>
+            </a:srgbClr>
+          </a:solidFill>
+          <a:ln>
+            <a:noFill/>
+          </a:ln>
+          <a:effectLst/>
+        </p:spPr>
+        <p:style>
+          <a:lnRef idx="1">
+            <a:schemeClr val="accent1"/>
+          </a:lnRef>
+          <a:fillRef idx="3">
+            <a:schemeClr val="accent1"/>
+          </a:fillRef>
+          <a:effectRef idx="2">
+            <a:schemeClr val="accent1"/>
+          </a:effectRef>
+          <a:fontRef idx="minor">
+            <a:schemeClr val="lt1"/>
+          </a:fontRef>
+        </p:style>
+        <p:txBody>
+          <a:bodyPr rtlCol="0" anchor="ctr"/>
+          <a:lstStyle/>
+          <a:p>
+            <a:pPr algn="ctr"/>
+          </a:p>
+        </p:txBody>
+      </p:sp>
+      <p:sp>
+        <p:nvSpPr>
+          <p:cNvPr id="13" name="Rounded Rectangle 12"/>
+          <p:cNvSpPr/>
+          <p:nvPr/>
+        </p:nvSpPr>
+        <p:spPr>
+          <a:xfrm>
+            <a:off x="548640" y="1591056"/>
+            <a:ext cx="64008" cy="740664"/>
+          </a:xfrm>
+          <a:prstGeom prst="roundRect">
+            <a:avLst>
+              <a:gd name="adj" fmla="val 50000"/>
+            </a:avLst>
+          </a:prstGeom>
+          <a:solidFill>
+            <a:srgbClr val="8D6A2A"/>
+          </a:solidFill>
+          <a:ln>
+            <a:noFill/>
+          </a:ln>
+          <a:effectLst>
+            <a:outerShdw blurRad="203200" dist="50800" dir="5400000" algn="t" rotWithShape="0">
+              <a:srgbClr val="1A2340">
+                <a:alpha val="20000"/>
+              </a:srgbClr>
+            </a:outerShdw>
+          </a:effectLst>
+          <a:scene3d>
+            <a:camera prst="orthographicFront"/>
+            <a:lightRig rig="threePt" dir="t"/>
+          </a:scene3d>
+          <a:sp3d>
+            <a:bevelT w="44450" h="25400" prst="softRound"/>
+          </a:sp3d>
+        </p:spPr>
+        <p:style>
+          <a:lnRef idx="1">
+            <a:schemeClr val="accent1"/>
+          </a:lnRef>
+          <a:fillRef idx="3">
+            <a:schemeClr val="accent1"/>
+          </a:fillRef>
+          <a:effectRef idx="2">
+            <a:schemeClr val="accent1"/>
+          </a:effectRef>
+          <a:fontRef idx="minor">
+            <a:schemeClr val="lt1"/>
+          </a:fontRef>
+        </p:style>
+        <p:txBody>
+          <a:bodyPr rtlCol="0" anchor="ctr"/>
+          <a:lstStyle/>
+          <a:p>
+            <a:pPr algn="ctr"/>
+          </a:p>
+        </p:txBody>
+      </p:sp>
+      <p:sp>
+        <p:nvSpPr>
+          <p:cNvPr id="14" name="TextBox 13"/>
           <p:cNvSpPr txBox="1"/>
           <p:nvPr/>
         </p:nvSpPr>
         <p:spPr>
           <a:xfrm>
-            <a:off x="548640" y="1554480"/>
-            <a:ext cx="11094415" cy="1202436"/>
+            <a:off x="777240" y="1554480"/>
+            <a:ext cx="10865815" cy="1202436"/>
           </a:xfrm>
           <a:prstGeom prst="rect">
             <a:avLst/>
@@ -21357,7 +23451,7 @@
       </p:sp>
       <p:sp>
         <p:nvSpPr>
-          <p:cNvPr id="12" name="Oval 11"/>
+          <p:cNvPr id="15" name="Oval 14"/>
           <p:cNvSpPr/>
           <p:nvPr/>
         </p:nvSpPr>
@@ -21410,7 +23504,7 @@
       </p:sp>
       <p:sp>
         <p:nvSpPr>
-          <p:cNvPr id="13" name="TextBox 12"/>
+          <p:cNvPr id="16" name="TextBox 15"/>
           <p:cNvSpPr txBox="1"/>
           <p:nvPr/>
         </p:nvSpPr>
@@ -21444,7 +23538,7 @@
       </p:sp>
       <p:sp>
         <p:nvSpPr>
-          <p:cNvPr id="14" name="Oval 13"/>
+          <p:cNvPr id="17" name="Oval 16"/>
           <p:cNvSpPr/>
           <p:nvPr/>
         </p:nvSpPr>
@@ -21497,7 +23591,7 @@
       </p:sp>
       <p:sp>
         <p:nvSpPr>
-          <p:cNvPr id="15" name="TextBox 14"/>
+          <p:cNvPr id="18" name="TextBox 17"/>
           <p:cNvSpPr txBox="1"/>
           <p:nvPr/>
         </p:nvSpPr>
@@ -21531,7 +23625,7 @@
       </p:sp>
       <p:sp>
         <p:nvSpPr>
-          <p:cNvPr id="16" name="Oval 15"/>
+          <p:cNvPr id="19" name="Oval 18"/>
           <p:cNvSpPr/>
           <p:nvPr/>
         </p:nvSpPr>
@@ -21584,7 +23678,7 @@
       </p:sp>
       <p:sp>
         <p:nvSpPr>
-          <p:cNvPr id="17" name="TextBox 16"/>
+          <p:cNvPr id="20" name="TextBox 19"/>
           <p:cNvSpPr txBox="1"/>
           <p:nvPr/>
         </p:nvSpPr>
@@ -22017,14 +24111,177 @@
       </p:pic>
       <p:sp>
         <p:nvSpPr>
-          <p:cNvPr id="11" name="TextBox 10"/>
+          <p:cNvPr id="11" name="Rounded Rectangle 10"/>
+          <p:cNvSpPr/>
+          <p:nvPr/>
+        </p:nvSpPr>
+        <p:spPr>
+          <a:xfrm>
+            <a:off x="411479" y="1444752"/>
+            <a:ext cx="11368735" cy="4800600"/>
+          </a:xfrm>
+          <a:prstGeom prst="roundRect">
+            <a:avLst>
+              <a:gd name="adj" fmla="val 4000"/>
+            </a:avLst>
+          </a:prstGeom>
+          <a:solidFill>
+            <a:srgbClr val="FFFFFF">
+              <a:alpha val="84000"/>
+            </a:srgbClr>
+          </a:solidFill>
+          <a:ln w="19050">
+            <a:solidFill>
+              <a:srgbClr val="FFFFFF"/>
+            </a:solidFill>
+          </a:ln>
+          <a:effectLst>
+            <a:outerShdw blurRad="203200" dist="50800" dir="5400000" algn="t" rotWithShape="0">
+              <a:srgbClr val="1A2340">
+                <a:alpha val="20000"/>
+              </a:srgbClr>
+            </a:outerShdw>
+          </a:effectLst>
+        </p:spPr>
+        <p:style>
+          <a:lnRef idx="1">
+            <a:schemeClr val="accent1"/>
+          </a:lnRef>
+          <a:fillRef idx="3">
+            <a:schemeClr val="accent1"/>
+          </a:fillRef>
+          <a:effectRef idx="2">
+            <a:schemeClr val="accent1"/>
+          </a:effectRef>
+          <a:fontRef idx="minor">
+            <a:schemeClr val="lt1"/>
+          </a:fontRef>
+        </p:style>
+        <p:txBody>
+          <a:bodyPr rtlCol="0" anchor="ctr"/>
+          <a:lstStyle/>
+          <a:p>
+            <a:pPr algn="ctr"/>
+          </a:p>
+        </p:txBody>
+      </p:sp>
+      <p:sp>
+        <p:nvSpPr>
+          <p:cNvPr id="12" name="Rounded Rectangle 11"/>
+          <p:cNvSpPr/>
+          <p:nvPr/>
+        </p:nvSpPr>
+        <p:spPr>
+          <a:xfrm>
+            <a:off x="731519" y="1508760"/>
+            <a:ext cx="10728655" cy="32004"/>
+          </a:xfrm>
+          <a:prstGeom prst="roundRect">
+            <a:avLst>
+              <a:gd name="adj" fmla="val 50000"/>
+            </a:avLst>
+          </a:prstGeom>
+          <a:solidFill>
+            <a:srgbClr val="FFFFFF">
+              <a:alpha val="85000"/>
+            </a:srgbClr>
+          </a:solidFill>
+          <a:ln>
+            <a:noFill/>
+          </a:ln>
+          <a:effectLst/>
+        </p:spPr>
+        <p:style>
+          <a:lnRef idx="1">
+            <a:schemeClr val="accent1"/>
+          </a:lnRef>
+          <a:fillRef idx="3">
+            <a:schemeClr val="accent1"/>
+          </a:fillRef>
+          <a:effectRef idx="2">
+            <a:schemeClr val="accent1"/>
+          </a:effectRef>
+          <a:fontRef idx="minor">
+            <a:schemeClr val="lt1"/>
+          </a:fontRef>
+        </p:style>
+        <p:txBody>
+          <a:bodyPr rtlCol="0" anchor="ctr"/>
+          <a:lstStyle/>
+          <a:p>
+            <a:pPr algn="ctr"/>
+          </a:p>
+        </p:txBody>
+      </p:sp>
+      <p:sp>
+        <p:nvSpPr>
+          <p:cNvPr id="13" name="Rounded Rectangle 12"/>
+          <p:cNvSpPr/>
+          <p:nvPr/>
+        </p:nvSpPr>
+        <p:spPr>
+          <a:xfrm>
+            <a:off x="548640" y="1591056"/>
+            <a:ext cx="64008" cy="594360"/>
+          </a:xfrm>
+          <a:prstGeom prst="roundRect">
+            <a:avLst>
+              <a:gd name="adj" fmla="val 50000"/>
+            </a:avLst>
+          </a:prstGeom>
+          <a:solidFill>
+            <a:srgbClr val="8D6A2A"/>
+          </a:solidFill>
+          <a:ln>
+            <a:noFill/>
+          </a:ln>
+          <a:effectLst>
+            <a:outerShdw blurRad="203200" dist="50800" dir="5400000" algn="t" rotWithShape="0">
+              <a:srgbClr val="1A2340">
+                <a:alpha val="20000"/>
+              </a:srgbClr>
+            </a:outerShdw>
+          </a:effectLst>
+          <a:scene3d>
+            <a:camera prst="orthographicFront"/>
+            <a:lightRig rig="threePt" dir="t"/>
+          </a:scene3d>
+          <a:sp3d>
+            <a:bevelT w="44450" h="25400" prst="softRound"/>
+          </a:sp3d>
+        </p:spPr>
+        <p:style>
+          <a:lnRef idx="1">
+            <a:schemeClr val="accent1"/>
+          </a:lnRef>
+          <a:fillRef idx="3">
+            <a:schemeClr val="accent1"/>
+          </a:fillRef>
+          <a:effectRef idx="2">
+            <a:schemeClr val="accent1"/>
+          </a:effectRef>
+          <a:fontRef idx="minor">
+            <a:schemeClr val="lt1"/>
+          </a:fontRef>
+        </p:style>
+        <p:txBody>
+          <a:bodyPr rtlCol="0" anchor="ctr"/>
+          <a:lstStyle/>
+          <a:p>
+            <a:pPr algn="ctr"/>
+          </a:p>
+        </p:txBody>
+      </p:sp>
+      <p:sp>
+        <p:nvSpPr>
+          <p:cNvPr id="14" name="TextBox 13"/>
           <p:cNvSpPr txBox="1"/>
           <p:nvPr/>
         </p:nvSpPr>
         <p:spPr>
           <a:xfrm>
-            <a:off x="548640" y="1554480"/>
-            <a:ext cx="11094415" cy="795528"/>
+            <a:off x="777240" y="1554480"/>
+            <a:ext cx="10865815" cy="795528"/>
           </a:xfrm>
           <a:prstGeom prst="rect">
             <a:avLst/>
@@ -22065,7 +24322,7 @@
       </p:sp>
       <p:sp>
         <p:nvSpPr>
-          <p:cNvPr id="12" name="Oval 11"/>
+          <p:cNvPr id="15" name="Oval 14"/>
           <p:cNvSpPr/>
           <p:nvPr/>
         </p:nvSpPr>
@@ -22118,7 +24375,7 @@
       </p:sp>
       <p:sp>
         <p:nvSpPr>
-          <p:cNvPr id="13" name="TextBox 12"/>
+          <p:cNvPr id="16" name="TextBox 15"/>
           <p:cNvSpPr txBox="1"/>
           <p:nvPr/>
         </p:nvSpPr>
@@ -22152,7 +24409,7 @@
       </p:sp>
       <p:sp>
         <p:nvSpPr>
-          <p:cNvPr id="14" name="Oval 13"/>
+          <p:cNvPr id="17" name="Oval 16"/>
           <p:cNvSpPr/>
           <p:nvPr/>
         </p:nvSpPr>
@@ -22205,7 +24462,7 @@
       </p:sp>
       <p:sp>
         <p:nvSpPr>
-          <p:cNvPr id="15" name="TextBox 14"/>
+          <p:cNvPr id="18" name="TextBox 17"/>
           <p:cNvSpPr txBox="1"/>
           <p:nvPr/>
         </p:nvSpPr>
@@ -22620,14 +24877,177 @@
       </p:pic>
       <p:sp>
         <p:nvSpPr>
-          <p:cNvPr id="11" name="TextBox 10"/>
+          <p:cNvPr id="11" name="Rounded Rectangle 10"/>
+          <p:cNvSpPr/>
+          <p:nvPr/>
+        </p:nvSpPr>
+        <p:spPr>
+          <a:xfrm>
+            <a:off x="411479" y="1444752"/>
+            <a:ext cx="11368735" cy="4800600"/>
+          </a:xfrm>
+          <a:prstGeom prst="roundRect">
+            <a:avLst>
+              <a:gd name="adj" fmla="val 4000"/>
+            </a:avLst>
+          </a:prstGeom>
+          <a:solidFill>
+            <a:srgbClr val="FFFFFF">
+              <a:alpha val="84000"/>
+            </a:srgbClr>
+          </a:solidFill>
+          <a:ln w="19050">
+            <a:solidFill>
+              <a:srgbClr val="FFFFFF"/>
+            </a:solidFill>
+          </a:ln>
+          <a:effectLst>
+            <a:outerShdw blurRad="203200" dist="50800" dir="5400000" algn="t" rotWithShape="0">
+              <a:srgbClr val="1A2340">
+                <a:alpha val="20000"/>
+              </a:srgbClr>
+            </a:outerShdw>
+          </a:effectLst>
+        </p:spPr>
+        <p:style>
+          <a:lnRef idx="1">
+            <a:schemeClr val="accent1"/>
+          </a:lnRef>
+          <a:fillRef idx="3">
+            <a:schemeClr val="accent1"/>
+          </a:fillRef>
+          <a:effectRef idx="2">
+            <a:schemeClr val="accent1"/>
+          </a:effectRef>
+          <a:fontRef idx="minor">
+            <a:schemeClr val="lt1"/>
+          </a:fontRef>
+        </p:style>
+        <p:txBody>
+          <a:bodyPr rtlCol="0" anchor="ctr"/>
+          <a:lstStyle/>
+          <a:p>
+            <a:pPr algn="ctr"/>
+          </a:p>
+        </p:txBody>
+      </p:sp>
+      <p:sp>
+        <p:nvSpPr>
+          <p:cNvPr id="12" name="Rounded Rectangle 11"/>
+          <p:cNvSpPr/>
+          <p:nvPr/>
+        </p:nvSpPr>
+        <p:spPr>
+          <a:xfrm>
+            <a:off x="731519" y="1508760"/>
+            <a:ext cx="10728655" cy="32004"/>
+          </a:xfrm>
+          <a:prstGeom prst="roundRect">
+            <a:avLst>
+              <a:gd name="adj" fmla="val 50000"/>
+            </a:avLst>
+          </a:prstGeom>
+          <a:solidFill>
+            <a:srgbClr val="FFFFFF">
+              <a:alpha val="85000"/>
+            </a:srgbClr>
+          </a:solidFill>
+          <a:ln>
+            <a:noFill/>
+          </a:ln>
+          <a:effectLst/>
+        </p:spPr>
+        <p:style>
+          <a:lnRef idx="1">
+            <a:schemeClr val="accent1"/>
+          </a:lnRef>
+          <a:fillRef idx="3">
+            <a:schemeClr val="accent1"/>
+          </a:fillRef>
+          <a:effectRef idx="2">
+            <a:schemeClr val="accent1"/>
+          </a:effectRef>
+          <a:fontRef idx="minor">
+            <a:schemeClr val="lt1"/>
+          </a:fontRef>
+        </p:style>
+        <p:txBody>
+          <a:bodyPr rtlCol="0" anchor="ctr"/>
+          <a:lstStyle/>
+          <a:p>
+            <a:pPr algn="ctr"/>
+          </a:p>
+        </p:txBody>
+      </p:sp>
+      <p:sp>
+        <p:nvSpPr>
+          <p:cNvPr id="13" name="Rounded Rectangle 12"/>
+          <p:cNvSpPr/>
+          <p:nvPr/>
+        </p:nvSpPr>
+        <p:spPr>
+          <a:xfrm>
+            <a:off x="548640" y="1591056"/>
+            <a:ext cx="64008" cy="2553462"/>
+          </a:xfrm>
+          <a:prstGeom prst="roundRect">
+            <a:avLst>
+              <a:gd name="adj" fmla="val 50000"/>
+            </a:avLst>
+          </a:prstGeom>
+          <a:solidFill>
+            <a:srgbClr val="8D6A2A"/>
+          </a:solidFill>
+          <a:ln>
+            <a:noFill/>
+          </a:ln>
+          <a:effectLst>
+            <a:outerShdw blurRad="203200" dist="50800" dir="5400000" algn="t" rotWithShape="0">
+              <a:srgbClr val="1A2340">
+                <a:alpha val="20000"/>
+              </a:srgbClr>
+            </a:outerShdw>
+          </a:effectLst>
+          <a:scene3d>
+            <a:camera prst="orthographicFront"/>
+            <a:lightRig rig="threePt" dir="t"/>
+          </a:scene3d>
+          <a:sp3d>
+            <a:bevelT w="44450" h="25400" prst="softRound"/>
+          </a:sp3d>
+        </p:spPr>
+        <p:style>
+          <a:lnRef idx="1">
+            <a:schemeClr val="accent1"/>
+          </a:lnRef>
+          <a:fillRef idx="3">
+            <a:schemeClr val="accent1"/>
+          </a:fillRef>
+          <a:effectRef idx="2">
+            <a:schemeClr val="accent1"/>
+          </a:effectRef>
+          <a:fontRef idx="minor">
+            <a:schemeClr val="lt1"/>
+          </a:fontRef>
+        </p:style>
+        <p:txBody>
+          <a:bodyPr rtlCol="0" anchor="ctr"/>
+          <a:lstStyle/>
+          <a:p>
+            <a:pPr algn="ctr"/>
+          </a:p>
+        </p:txBody>
+      </p:sp>
+      <p:sp>
+        <p:nvSpPr>
+          <p:cNvPr id="14" name="TextBox 13"/>
           <p:cNvSpPr txBox="1"/>
           <p:nvPr/>
         </p:nvSpPr>
         <p:spPr>
           <a:xfrm>
-            <a:off x="548640" y="1554480"/>
-            <a:ext cx="4480560" cy="4617720"/>
+            <a:off x="777240" y="1554480"/>
+            <a:ext cx="4251960" cy="4617720"/>
           </a:xfrm>
           <a:prstGeom prst="rect">
             <a:avLst/>
@@ -22691,9 +25111,63 @@
           </a:p>
         </p:txBody>
       </p:sp>
+      <p:sp>
+        <p:nvSpPr>
+          <p:cNvPr id="15" name="Rounded Rectangle 14"/>
+          <p:cNvSpPr/>
+          <p:nvPr/>
+        </p:nvSpPr>
+        <p:spPr>
+          <a:xfrm>
+            <a:off x="5394959" y="1554480"/>
+            <a:ext cx="6248095" cy="4617720"/>
+          </a:xfrm>
+          <a:prstGeom prst="roundRect">
+            <a:avLst>
+              <a:gd name="adj" fmla="val 3000"/>
+            </a:avLst>
+          </a:prstGeom>
+          <a:solidFill>
+            <a:srgbClr val="FFFFFF"/>
+          </a:solidFill>
+          <a:ln w="9525">
+            <a:solidFill>
+              <a:srgbClr val="DDDFEE"/>
+            </a:solidFill>
+          </a:ln>
+          <a:effectLst>
+            <a:outerShdw blurRad="203200" dist="50800" dir="5400000" algn="t" rotWithShape="0">
+              <a:srgbClr val="1A2340">
+                <a:alpha val="20000"/>
+              </a:srgbClr>
+            </a:outerShdw>
+          </a:effectLst>
+        </p:spPr>
+        <p:style>
+          <a:lnRef idx="1">
+            <a:schemeClr val="accent1"/>
+          </a:lnRef>
+          <a:fillRef idx="3">
+            <a:schemeClr val="accent1"/>
+          </a:fillRef>
+          <a:effectRef idx="2">
+            <a:schemeClr val="accent1"/>
+          </a:effectRef>
+          <a:fontRef idx="minor">
+            <a:schemeClr val="lt1"/>
+          </a:fontRef>
+        </p:style>
+        <p:txBody>
+          <a:bodyPr rtlCol="0" anchor="ctr"/>
+          <a:lstStyle/>
+          <a:p>
+            <a:pPr algn="ctr"/>
+          </a:p>
+        </p:txBody>
+      </p:sp>
       <p:pic>
         <p:nvPicPr>
-          <p:cNvPr id="12" name="Picture 11" descr="In the periphery, levodopa is converted by AADC to dopamine (blocked by carbidopa) and by COMT to 3-O-methyldopa (blocked by entacapone). Levodopa crosses the blood-brain barrier and brain AADC makes dopamine, which MAO-B breaks down; selegiline and rasagiline block this."/>
+          <p:cNvPr id="16" name="Picture 15" descr="In the periphery, levodopa is converted by AADC to dopamine (blocked by carbidopa) and by COMT to 3-O-methyldopa (blocked by entacapone). Levodopa crosses the blood-brain barrier and brain AADC makes dopamine, which MAO-B breaks down; selegiline and rasagiline block this."/>
           <p:cNvPicPr>
             <a:picLocks noChangeAspect="1"/>
           </p:cNvPicPr>
@@ -22707,8 +25181,8 @@
         </p:blipFill>
         <p:spPr>
           <a:xfrm>
-            <a:off x="5394959" y="1554480"/>
-            <a:ext cx="6248095" cy="2984278"/>
+            <a:off x="5532120" y="1664207"/>
+            <a:ext cx="5973775" cy="2853254"/>
           </a:xfrm>
           <a:prstGeom prst="rect">
             <a:avLst/>
@@ -22717,14 +25191,14 @@
       </p:pic>
       <p:sp>
         <p:nvSpPr>
-          <p:cNvPr id="13" name="TextBox 12"/>
+          <p:cNvPr id="17" name="TextBox 16"/>
           <p:cNvSpPr txBox="1"/>
           <p:nvPr/>
         </p:nvSpPr>
         <p:spPr>
           <a:xfrm>
-            <a:off x="5394959" y="4630197"/>
-            <a:ext cx="6248095" cy="538988"/>
+            <a:off x="5532120" y="4608901"/>
+            <a:ext cx="5973775" cy="538988"/>
           </a:xfrm>
           <a:prstGeom prst="rect">
             <a:avLst/>
@@ -23133,14 +25607,177 @@
       </p:pic>
       <p:sp>
         <p:nvSpPr>
-          <p:cNvPr id="11" name="TextBox 10"/>
+          <p:cNvPr id="11" name="Rounded Rectangle 10"/>
+          <p:cNvSpPr/>
+          <p:nvPr/>
+        </p:nvSpPr>
+        <p:spPr>
+          <a:xfrm>
+            <a:off x="411479" y="1444752"/>
+            <a:ext cx="11368735" cy="4800600"/>
+          </a:xfrm>
+          <a:prstGeom prst="roundRect">
+            <a:avLst>
+              <a:gd name="adj" fmla="val 4000"/>
+            </a:avLst>
+          </a:prstGeom>
+          <a:solidFill>
+            <a:srgbClr val="FFFFFF">
+              <a:alpha val="84000"/>
+            </a:srgbClr>
+          </a:solidFill>
+          <a:ln w="19050">
+            <a:solidFill>
+              <a:srgbClr val="FFFFFF"/>
+            </a:solidFill>
+          </a:ln>
+          <a:effectLst>
+            <a:outerShdw blurRad="203200" dist="50800" dir="5400000" algn="t" rotWithShape="0">
+              <a:srgbClr val="1A2340">
+                <a:alpha val="20000"/>
+              </a:srgbClr>
+            </a:outerShdw>
+          </a:effectLst>
+        </p:spPr>
+        <p:style>
+          <a:lnRef idx="1">
+            <a:schemeClr val="accent1"/>
+          </a:lnRef>
+          <a:fillRef idx="3">
+            <a:schemeClr val="accent1"/>
+          </a:fillRef>
+          <a:effectRef idx="2">
+            <a:schemeClr val="accent1"/>
+          </a:effectRef>
+          <a:fontRef idx="minor">
+            <a:schemeClr val="lt1"/>
+          </a:fontRef>
+        </p:style>
+        <p:txBody>
+          <a:bodyPr rtlCol="0" anchor="ctr"/>
+          <a:lstStyle/>
+          <a:p>
+            <a:pPr algn="ctr"/>
+          </a:p>
+        </p:txBody>
+      </p:sp>
+      <p:sp>
+        <p:nvSpPr>
+          <p:cNvPr id="12" name="Rounded Rectangle 11"/>
+          <p:cNvSpPr/>
+          <p:nvPr/>
+        </p:nvSpPr>
+        <p:spPr>
+          <a:xfrm>
+            <a:off x="731519" y="1508760"/>
+            <a:ext cx="10728655" cy="32004"/>
+          </a:xfrm>
+          <a:prstGeom prst="roundRect">
+            <a:avLst>
+              <a:gd name="adj" fmla="val 50000"/>
+            </a:avLst>
+          </a:prstGeom>
+          <a:solidFill>
+            <a:srgbClr val="FFFFFF">
+              <a:alpha val="85000"/>
+            </a:srgbClr>
+          </a:solidFill>
+          <a:ln>
+            <a:noFill/>
+          </a:ln>
+          <a:effectLst/>
+        </p:spPr>
+        <p:style>
+          <a:lnRef idx="1">
+            <a:schemeClr val="accent1"/>
+          </a:lnRef>
+          <a:fillRef idx="3">
+            <a:schemeClr val="accent1"/>
+          </a:fillRef>
+          <a:effectRef idx="2">
+            <a:schemeClr val="accent1"/>
+          </a:effectRef>
+          <a:fontRef idx="minor">
+            <a:schemeClr val="lt1"/>
+          </a:fontRef>
+        </p:style>
+        <p:txBody>
+          <a:bodyPr rtlCol="0" anchor="ctr"/>
+          <a:lstStyle/>
+          <a:p>
+            <a:pPr algn="ctr"/>
+          </a:p>
+        </p:txBody>
+      </p:sp>
+      <p:sp>
+        <p:nvSpPr>
+          <p:cNvPr id="13" name="Rounded Rectangle 12"/>
+          <p:cNvSpPr/>
+          <p:nvPr/>
+        </p:nvSpPr>
+        <p:spPr>
+          <a:xfrm>
+            <a:off x="548640" y="1591056"/>
+            <a:ext cx="64008" cy="315468"/>
+          </a:xfrm>
+          <a:prstGeom prst="roundRect">
+            <a:avLst>
+              <a:gd name="adj" fmla="val 50000"/>
+            </a:avLst>
+          </a:prstGeom>
+          <a:solidFill>
+            <a:srgbClr val="8D6A2A"/>
+          </a:solidFill>
+          <a:ln>
+            <a:noFill/>
+          </a:ln>
+          <a:effectLst>
+            <a:outerShdw blurRad="203200" dist="50800" dir="5400000" algn="t" rotWithShape="0">
+              <a:srgbClr val="1A2340">
+                <a:alpha val="20000"/>
+              </a:srgbClr>
+            </a:outerShdw>
+          </a:effectLst>
+          <a:scene3d>
+            <a:camera prst="orthographicFront"/>
+            <a:lightRig rig="threePt" dir="t"/>
+          </a:scene3d>
+          <a:sp3d>
+            <a:bevelT w="44450" h="25400" prst="softRound"/>
+          </a:sp3d>
+        </p:spPr>
+        <p:style>
+          <a:lnRef idx="1">
+            <a:schemeClr val="accent1"/>
+          </a:lnRef>
+          <a:fillRef idx="3">
+            <a:schemeClr val="accent1"/>
+          </a:fillRef>
+          <a:effectRef idx="2">
+            <a:schemeClr val="accent1"/>
+          </a:effectRef>
+          <a:fontRef idx="minor">
+            <a:schemeClr val="lt1"/>
+          </a:fontRef>
+        </p:style>
+        <p:txBody>
+          <a:bodyPr rtlCol="0" anchor="ctr"/>
+          <a:lstStyle/>
+          <a:p>
+            <a:pPr algn="ctr"/>
+          </a:p>
+        </p:txBody>
+      </p:sp>
+      <p:sp>
+        <p:nvSpPr>
+          <p:cNvPr id="14" name="TextBox 13"/>
           <p:cNvSpPr txBox="1"/>
           <p:nvPr/>
         </p:nvSpPr>
         <p:spPr>
           <a:xfrm>
-            <a:off x="548640" y="1554480"/>
-            <a:ext cx="11094415" cy="498348"/>
+            <a:off x="777240" y="1554480"/>
+            <a:ext cx="10865815" cy="498348"/>
           </a:xfrm>
           <a:prstGeom prst="rect">
             <a:avLst/>
@@ -23172,7 +25809,7 @@
       </p:sp>
       <p:sp>
         <p:nvSpPr>
-          <p:cNvPr id="12" name="Oval 11"/>
+          <p:cNvPr id="15" name="Oval 14"/>
           <p:cNvSpPr/>
           <p:nvPr/>
         </p:nvSpPr>
@@ -23225,7 +25862,7 @@
       </p:sp>
       <p:sp>
         <p:nvSpPr>
-          <p:cNvPr id="13" name="TextBox 12"/>
+          <p:cNvPr id="16" name="TextBox 15"/>
           <p:cNvSpPr txBox="1"/>
           <p:nvPr/>
         </p:nvSpPr>
@@ -23268,7 +25905,7 @@
       </p:sp>
       <p:sp>
         <p:nvSpPr>
-          <p:cNvPr id="14" name="Oval 13"/>
+          <p:cNvPr id="17" name="Oval 16"/>
           <p:cNvSpPr/>
           <p:nvPr/>
         </p:nvSpPr>
@@ -23321,7 +25958,7 @@
       </p:sp>
       <p:sp>
         <p:nvSpPr>
-          <p:cNvPr id="15" name="TextBox 14"/>
+          <p:cNvPr id="18" name="TextBox 17"/>
           <p:cNvSpPr txBox="1"/>
           <p:nvPr/>
         </p:nvSpPr>
@@ -23364,7 +26001,7 @@
       </p:sp>
       <p:sp>
         <p:nvSpPr>
-          <p:cNvPr id="16" name="Oval 15"/>
+          <p:cNvPr id="19" name="Oval 18"/>
           <p:cNvSpPr/>
           <p:nvPr/>
         </p:nvSpPr>
@@ -23417,7 +26054,7 @@
       </p:sp>
       <p:sp>
         <p:nvSpPr>
-          <p:cNvPr id="17" name="TextBox 16"/>
+          <p:cNvPr id="20" name="TextBox 19"/>
           <p:cNvSpPr txBox="1"/>
           <p:nvPr/>
         </p:nvSpPr>
@@ -23841,14 +26478,177 @@
       </p:pic>
       <p:sp>
         <p:nvSpPr>
-          <p:cNvPr id="11" name="TextBox 10"/>
+          <p:cNvPr id="11" name="Rounded Rectangle 10"/>
+          <p:cNvSpPr/>
+          <p:nvPr/>
+        </p:nvSpPr>
+        <p:spPr>
+          <a:xfrm>
+            <a:off x="411479" y="1444752"/>
+            <a:ext cx="11368735" cy="4800600"/>
+          </a:xfrm>
+          <a:prstGeom prst="roundRect">
+            <a:avLst>
+              <a:gd name="adj" fmla="val 4000"/>
+            </a:avLst>
+          </a:prstGeom>
+          <a:solidFill>
+            <a:srgbClr val="FFFFFF">
+              <a:alpha val="84000"/>
+            </a:srgbClr>
+          </a:solidFill>
+          <a:ln w="19050">
+            <a:solidFill>
+              <a:srgbClr val="FFFFFF"/>
+            </a:solidFill>
+          </a:ln>
+          <a:effectLst>
+            <a:outerShdw blurRad="203200" dist="50800" dir="5400000" algn="t" rotWithShape="0">
+              <a:srgbClr val="1A2340">
+                <a:alpha val="20000"/>
+              </a:srgbClr>
+            </a:outerShdw>
+          </a:effectLst>
+        </p:spPr>
+        <p:style>
+          <a:lnRef idx="1">
+            <a:schemeClr val="accent1"/>
+          </a:lnRef>
+          <a:fillRef idx="3">
+            <a:schemeClr val="accent1"/>
+          </a:fillRef>
+          <a:effectRef idx="2">
+            <a:schemeClr val="accent1"/>
+          </a:effectRef>
+          <a:fontRef idx="minor">
+            <a:schemeClr val="lt1"/>
+          </a:fontRef>
+        </p:style>
+        <p:txBody>
+          <a:bodyPr rtlCol="0" anchor="ctr"/>
+          <a:lstStyle/>
+          <a:p>
+            <a:pPr algn="ctr"/>
+          </a:p>
+        </p:txBody>
+      </p:sp>
+      <p:sp>
+        <p:nvSpPr>
+          <p:cNvPr id="12" name="Rounded Rectangle 11"/>
+          <p:cNvSpPr/>
+          <p:nvPr/>
+        </p:nvSpPr>
+        <p:spPr>
+          <a:xfrm>
+            <a:off x="731519" y="1508760"/>
+            <a:ext cx="10728655" cy="32004"/>
+          </a:xfrm>
+          <a:prstGeom prst="roundRect">
+            <a:avLst>
+              <a:gd name="adj" fmla="val 50000"/>
+            </a:avLst>
+          </a:prstGeom>
+          <a:solidFill>
+            <a:srgbClr val="FFFFFF">
+              <a:alpha val="85000"/>
+            </a:srgbClr>
+          </a:solidFill>
+          <a:ln>
+            <a:noFill/>
+          </a:ln>
+          <a:effectLst/>
+        </p:spPr>
+        <p:style>
+          <a:lnRef idx="1">
+            <a:schemeClr val="accent1"/>
+          </a:lnRef>
+          <a:fillRef idx="3">
+            <a:schemeClr val="accent1"/>
+          </a:fillRef>
+          <a:effectRef idx="2">
+            <a:schemeClr val="accent1"/>
+          </a:effectRef>
+          <a:fontRef idx="minor">
+            <a:schemeClr val="lt1"/>
+          </a:fontRef>
+        </p:style>
+        <p:txBody>
+          <a:bodyPr rtlCol="0" anchor="ctr"/>
+          <a:lstStyle/>
+          <a:p>
+            <a:pPr algn="ctr"/>
+          </a:p>
+        </p:txBody>
+      </p:sp>
+      <p:sp>
+        <p:nvSpPr>
+          <p:cNvPr id="13" name="Rounded Rectangle 12"/>
+          <p:cNvSpPr/>
+          <p:nvPr/>
+        </p:nvSpPr>
+        <p:spPr>
+          <a:xfrm>
+            <a:off x="548640" y="1591056"/>
+            <a:ext cx="64008" cy="873252"/>
+          </a:xfrm>
+          <a:prstGeom prst="roundRect">
+            <a:avLst>
+              <a:gd name="adj" fmla="val 50000"/>
+            </a:avLst>
+          </a:prstGeom>
+          <a:solidFill>
+            <a:srgbClr val="8D6A2A"/>
+          </a:solidFill>
+          <a:ln>
+            <a:noFill/>
+          </a:ln>
+          <a:effectLst>
+            <a:outerShdw blurRad="203200" dist="50800" dir="5400000" algn="t" rotWithShape="0">
+              <a:srgbClr val="1A2340">
+                <a:alpha val="20000"/>
+              </a:srgbClr>
+            </a:outerShdw>
+          </a:effectLst>
+          <a:scene3d>
+            <a:camera prst="orthographicFront"/>
+            <a:lightRig rig="threePt" dir="t"/>
+          </a:scene3d>
+          <a:sp3d>
+            <a:bevelT w="44450" h="25400" prst="softRound"/>
+          </a:sp3d>
+        </p:spPr>
+        <p:style>
+          <a:lnRef idx="1">
+            <a:schemeClr val="accent1"/>
+          </a:lnRef>
+          <a:fillRef idx="3">
+            <a:schemeClr val="accent1"/>
+          </a:fillRef>
+          <a:effectRef idx="2">
+            <a:schemeClr val="accent1"/>
+          </a:effectRef>
+          <a:fontRef idx="minor">
+            <a:schemeClr val="lt1"/>
+          </a:fontRef>
+        </p:style>
+        <p:txBody>
+          <a:bodyPr rtlCol="0" anchor="ctr"/>
+          <a:lstStyle/>
+          <a:p>
+            <a:pPr algn="ctr"/>
+          </a:p>
+        </p:txBody>
+      </p:sp>
+      <p:sp>
+        <p:nvSpPr>
+          <p:cNvPr id="14" name="TextBox 13"/>
           <p:cNvSpPr txBox="1"/>
           <p:nvPr/>
         </p:nvSpPr>
         <p:spPr>
           <a:xfrm>
-            <a:off x="548640" y="1554480"/>
-            <a:ext cx="11094415" cy="1092708"/>
+            <a:off x="777240" y="1554480"/>
+            <a:ext cx="10865815" cy="1092708"/>
           </a:xfrm>
           <a:prstGeom prst="rect">
             <a:avLst/>
@@ -23880,7 +26680,7 @@
       </p:sp>
       <p:graphicFrame>
         <p:nvGraphicFramePr>
-          <p:cNvPr id="12" name="Table 11"/>
+          <p:cNvPr id="15" name="Table 14"/>
           <p:cNvGraphicFramePr>
             <a:graphicFrameLocks noGrp="1"/>
           </p:cNvGraphicFramePr>
